--- a/public/fun/pack/pptx/birthday/돌잔치_19_감사인사중심_반딧불마을.pptx
+++ b/public/fun/pack/pptx/birthday/돌잔치_19_감사인사중심_반딧불마을.pptx
@@ -3286,14 +3286,6 @@
 <file path=ppt/slides/slide1.xml><?xml version="1.0" encoding="utf-8"?>
 <p:sld xmlns:a="http://schemas.openxmlformats.org/drawingml/2006/main" xmlns:p="http://schemas.openxmlformats.org/presentationml/2006/main" xmlns:r="http://schemas.openxmlformats.org/officeDocument/2006/relationships">
   <p:cSld>
-    <p:bg>
-      <p:bgPr>
-        <a:solidFill>
-          <a:srgbClr val="FFFFFF"/>
-        </a:solidFill>
-        <a:effectLst/>
-      </p:bgPr>
-    </p:bg>
     <p:spTree>
       <p:nvGrpSpPr>
         <p:cNvPr id="1" name=""/>
@@ -3301,238 +3293,30 @@
         <p:nvPr/>
       </p:nvGrpSpPr>
       <p:grpSpPr/>
-      <p:sp>
-        <p:nvSpPr>
-          <p:cNvPr id="3" name="장식"/>
-          <p:cNvSpPr/>
+      <p:pic>
+        <p:nvPicPr>
+          <p:cNvPr id="3" name="표지 그림" descr="birthday-19.jpg"/>
+          <p:cNvPicPr>
+            <a:picLocks noChangeAspect="1"/>
+          </p:cNvPicPr>
           <p:nvPr/>
-        </p:nvSpPr>
-        <p:spPr>
-          <a:xfrm>
-            <a:off x="7071183" y="-1714500"/>
-            <a:ext cx="7886700" cy="7886700"/>
-          </a:xfrm>
-          <a:prstGeom prst="ellipse">
+        </p:nvPicPr>
+        <p:blipFill>
+          <a:blip r:embed="rId2"/>
+          <a:stretch>
+            <a:fillRect/>
+          </a:stretch>
+        </p:blipFill>
+        <p:spPr>
+          <a:xfrm>
+            <a:off x="0" y="0"/>
+            <a:ext cx="12191695" cy="6858000"/>
+          </a:xfrm>
+          <a:prstGeom prst="rect">
             <a:avLst/>
           </a:prstGeom>
-          <a:solidFill>
-            <a:srgbClr val="D0F1E6"/>
-          </a:solidFill>
-          <a:ln>
-            <a:noFill/>
-          </a:ln>
-        </p:spPr>
-        <p:txBody>
-          <a:bodyPr rtlCol="0" anchor="ctr"/>
-          <a:lstStyle/>
-          <a:p>
-            <a:pPr algn="ctr"/>
-          </a:p>
-        </p:txBody>
-      </p:sp>
-      <p:sp>
-        <p:nvSpPr>
-          <p:cNvPr id="4" name="장식"/>
-          <p:cNvSpPr/>
-          <p:nvPr/>
-        </p:nvSpPr>
-        <p:spPr>
-          <a:xfrm>
-            <a:off x="9509522" y="3977639"/>
-            <a:ext cx="3429000" cy="3429000"/>
-          </a:xfrm>
-          <a:prstGeom prst="ellipse">
-            <a:avLst/>
-          </a:prstGeom>
-          <a:solidFill>
-            <a:srgbClr val="246B53"/>
-          </a:solidFill>
-          <a:ln>
-            <a:noFill/>
-          </a:ln>
-        </p:spPr>
-        <p:txBody>
-          <a:bodyPr rtlCol="0" anchor="ctr"/>
-          <a:lstStyle/>
-          <a:p>
-            <a:pPr algn="ctr"/>
-          </a:p>
-        </p:txBody>
-      </p:sp>
-      <p:sp>
-        <p:nvSpPr>
-          <p:cNvPr id="5" name="장식"/>
-          <p:cNvSpPr/>
-          <p:nvPr/>
-        </p:nvSpPr>
-        <p:spPr>
-          <a:xfrm rot="47073">
-            <a:off x="10370041" y="1303642"/>
-            <a:ext cx="972669" cy="972669"/>
-          </a:xfrm>
-          <a:prstGeom prst="star5">
-            <a:avLst/>
-          </a:prstGeom>
-          <a:solidFill>
-            <a:srgbClr val="246B53"/>
-          </a:solidFill>
-          <a:ln>
-            <a:noFill/>
-          </a:ln>
-        </p:spPr>
-        <p:txBody>
-          <a:bodyPr rtlCol="0" anchor="ctr"/>
-          <a:lstStyle/>
-          <a:p>
-            <a:pPr algn="ctr"/>
-          </a:p>
-        </p:txBody>
-      </p:sp>
-      <p:sp>
-        <p:nvSpPr>
-          <p:cNvPr id="6" name="장식"/>
-          <p:cNvSpPr/>
-          <p:nvPr/>
-        </p:nvSpPr>
-        <p:spPr>
-          <a:xfrm rot="616000">
-            <a:off x="10966056" y="404965"/>
-            <a:ext cx="415579" cy="415579"/>
-          </a:xfrm>
-          <a:prstGeom prst="star5">
-            <a:avLst/>
-          </a:prstGeom>
-          <a:solidFill>
-            <a:srgbClr val="D0F1E6"/>
-          </a:solidFill>
-          <a:ln>
-            <a:noFill/>
-          </a:ln>
-        </p:spPr>
-        <p:txBody>
-          <a:bodyPr rtlCol="0" anchor="ctr"/>
-          <a:lstStyle/>
-          <a:p>
-            <a:pPr algn="ctr"/>
-          </a:p>
-        </p:txBody>
-      </p:sp>
-      <p:sp>
-        <p:nvSpPr>
-          <p:cNvPr id="7" name="장식"/>
-          <p:cNvSpPr/>
-          <p:nvPr/>
-        </p:nvSpPr>
-        <p:spPr>
-          <a:xfrm rot="291727">
-            <a:off x="8517029" y="1857812"/>
-            <a:ext cx="743304" cy="743304"/>
-          </a:xfrm>
-          <a:prstGeom prst="star5">
-            <a:avLst/>
-          </a:prstGeom>
-          <a:solidFill>
-            <a:srgbClr val="913B83"/>
-          </a:solidFill>
-          <a:ln>
-            <a:noFill/>
-          </a:ln>
-        </p:spPr>
-        <p:txBody>
-          <a:bodyPr rtlCol="0" anchor="ctr"/>
-          <a:lstStyle/>
-          <a:p>
-            <a:pPr algn="ctr"/>
-          </a:p>
-        </p:txBody>
-      </p:sp>
-      <p:sp>
-        <p:nvSpPr>
-          <p:cNvPr id="8" name="장식"/>
-          <p:cNvSpPr/>
-          <p:nvPr/>
-        </p:nvSpPr>
-        <p:spPr>
-          <a:xfrm rot="486238">
-            <a:off x="10732199" y="2536825"/>
-            <a:ext cx="862336" cy="862336"/>
-          </a:xfrm>
-          <a:prstGeom prst="star5">
-            <a:avLst/>
-          </a:prstGeom>
-          <a:solidFill>
-            <a:srgbClr val="246B53"/>
-          </a:solidFill>
-          <a:ln>
-            <a:noFill/>
-          </a:ln>
-        </p:spPr>
-        <p:txBody>
-          <a:bodyPr rtlCol="0" anchor="ctr"/>
-          <a:lstStyle/>
-          <a:p>
-            <a:pPr algn="ctr"/>
-          </a:p>
-        </p:txBody>
-      </p:sp>
-      <p:sp>
-        <p:nvSpPr>
-          <p:cNvPr id="9" name="장식"/>
-          <p:cNvSpPr/>
-          <p:nvPr/>
-        </p:nvSpPr>
-        <p:spPr>
-          <a:xfrm rot="21114457">
-            <a:off x="10694079" y="2423818"/>
-            <a:ext cx="852890" cy="852890"/>
-          </a:xfrm>
-          <a:prstGeom prst="star5">
-            <a:avLst/>
-          </a:prstGeom>
-          <a:solidFill>
-            <a:srgbClr val="D0F1E6"/>
-          </a:solidFill>
-          <a:ln>
-            <a:noFill/>
-          </a:ln>
-        </p:spPr>
-        <p:txBody>
-          <a:bodyPr rtlCol="0" anchor="ctr"/>
-          <a:lstStyle/>
-          <a:p>
-            <a:pPr algn="ctr"/>
-          </a:p>
-        </p:txBody>
-      </p:sp>
-      <p:sp>
-        <p:nvSpPr>
-          <p:cNvPr id="10" name="장식"/>
-          <p:cNvSpPr/>
-          <p:nvPr/>
-        </p:nvSpPr>
-        <p:spPr>
-          <a:xfrm rot="21340827">
-            <a:off x="10442192" y="1296230"/>
-            <a:ext cx="435134" cy="435134"/>
-          </a:xfrm>
-          <a:prstGeom prst="star5">
-            <a:avLst/>
-          </a:prstGeom>
-          <a:solidFill>
-            <a:srgbClr val="913B83"/>
-          </a:solidFill>
-          <a:ln>
-            <a:noFill/>
-          </a:ln>
-        </p:spPr>
-        <p:txBody>
-          <a:bodyPr rtlCol="0" anchor="ctr"/>
-          <a:lstStyle/>
-          <a:p>
-            <a:pPr algn="ctr"/>
-          </a:p>
-        </p:txBody>
-      </p:sp>
+        </p:spPr>
+      </p:pic>
       <p:sp>
         <p:nvSpPr>
           <p:cNvPr id="2" name="Title 1"/>
@@ -3546,7 +3330,7 @@
         <p:spPr>
           <a:xfrm>
             <a:off x="853418" y="2057400"/>
-            <a:ext cx="6705432" cy="1463040"/>
+            <a:ext cx="6095847" cy="1554480"/>
           </a:xfrm>
         </p:spPr>
         <p:txBody>
@@ -3573,13 +3357,13 @@
       </p:sp>
       <p:sp>
         <p:nvSpPr>
-          <p:cNvPr id="11" name="한 줄 문구"/>
+          <p:cNvPr id="4" name="한 줄 문구"/>
           <p:cNvSpPr txBox="1"/>
           <p:nvPr/>
         </p:nvSpPr>
         <p:spPr>
           <a:xfrm>
-            <a:off x="853418" y="3611880"/>
+            <a:off x="853418" y="3749039"/>
             <a:ext cx="6095847" cy="822960"/>
           </a:xfrm>
           <a:prstGeom prst="rect">
@@ -3604,20 +3388,20 @@
                   <a:srgbClr val="143D30"/>
                 </a:solidFill>
               </a:rPr>
-              <a:t>반딧불처럼 반짝이는 눈망울</a:t>
-            </a:r>
-          </a:p>
-        </p:txBody>
-      </p:sp>
-      <p:sp>
-        <p:nvSpPr>
-          <p:cNvPr id="12" name="안내 문구"/>
+              <a:t>바쁘신 중에도 와 주셔서 고맙습니다</a:t>
+            </a:r>
+          </a:p>
+        </p:txBody>
+      </p:sp>
+      <p:sp>
+        <p:nvSpPr>
+          <p:cNvPr id="5" name="안내 문구"/>
           <p:cNvSpPr txBox="1"/>
           <p:nvPr/>
         </p:nvSpPr>
         <p:spPr>
           <a:xfrm>
-            <a:off x="853418" y="4480560"/>
+            <a:off x="853418" y="4617720"/>
             <a:ext cx="6095847" cy="914400"/>
           </a:xfrm>
           <a:prstGeom prst="rect">
@@ -3642,7 +3426,7 @@
                   <a:srgbClr val="666666"/>
                 </a:solidFill>
               </a:rPr>
-              <a:t>아기 이름 · 2026. 00. 00</a:t>
+              <a:t>아기 이름 · 2027. 00. 00</a:t>
             </a:r>
           </a:p>
           <a:p>
@@ -3748,180 +3532,6 @@
       </p:sp>
       <p:sp>
         <p:nvSpPr>
-          <p:cNvPr id="5" name="장식"/>
-          <p:cNvSpPr/>
-          <p:nvPr/>
-        </p:nvSpPr>
-        <p:spPr>
-          <a:xfrm rot="47073">
-            <a:off x="11538365" y="657714"/>
-            <a:ext cx="339662" cy="339662"/>
-          </a:xfrm>
-          <a:prstGeom prst="star5">
-            <a:avLst/>
-          </a:prstGeom>
-          <a:solidFill>
-            <a:srgbClr val="246B53"/>
-          </a:solidFill>
-          <a:ln>
-            <a:noFill/>
-          </a:ln>
-        </p:spPr>
-        <p:txBody>
-          <a:bodyPr rtlCol="0" anchor="ctr"/>
-          <a:lstStyle/>
-          <a:p>
-            <a:pPr algn="ctr"/>
-          </a:p>
-        </p:txBody>
-      </p:sp>
-      <p:sp>
-        <p:nvSpPr>
-          <p:cNvPr id="6" name="장식"/>
-          <p:cNvSpPr/>
-          <p:nvPr/>
-        </p:nvSpPr>
-        <p:spPr>
-          <a:xfrm rot="616000">
-            <a:off x="11746497" y="343890"/>
-            <a:ext cx="145122" cy="145122"/>
-          </a:xfrm>
-          <a:prstGeom prst="star5">
-            <a:avLst/>
-          </a:prstGeom>
-          <a:solidFill>
-            <a:srgbClr val="D0F1E6"/>
-          </a:solidFill>
-          <a:ln>
-            <a:noFill/>
-          </a:ln>
-        </p:spPr>
-        <p:txBody>
-          <a:bodyPr rtlCol="0" anchor="ctr"/>
-          <a:lstStyle/>
-          <a:p>
-            <a:pPr algn="ctr"/>
-          </a:p>
-        </p:txBody>
-      </p:sp>
-      <p:sp>
-        <p:nvSpPr>
-          <p:cNvPr id="7" name="장식"/>
-          <p:cNvSpPr/>
-          <p:nvPr/>
-        </p:nvSpPr>
-        <p:spPr>
-          <a:xfrm rot="291727">
-            <a:off x="10891282" y="851234"/>
-            <a:ext cx="259566" cy="259566"/>
-          </a:xfrm>
-          <a:prstGeom prst="star5">
-            <a:avLst/>
-          </a:prstGeom>
-          <a:solidFill>
-            <a:srgbClr val="913B83"/>
-          </a:solidFill>
-          <a:ln>
-            <a:noFill/>
-          </a:ln>
-        </p:spPr>
-        <p:txBody>
-          <a:bodyPr rtlCol="0" anchor="ctr"/>
-          <a:lstStyle/>
-          <a:p>
-            <a:pPr algn="ctr"/>
-          </a:p>
-        </p:txBody>
-      </p:sp>
-      <p:sp>
-        <p:nvSpPr>
-          <p:cNvPr id="8" name="장식"/>
-          <p:cNvSpPr/>
-          <p:nvPr/>
-        </p:nvSpPr>
-        <p:spPr>
-          <a:xfrm rot="486238">
-            <a:off x="11664833" y="1088349"/>
-            <a:ext cx="301133" cy="301133"/>
-          </a:xfrm>
-          <a:prstGeom prst="star5">
-            <a:avLst/>
-          </a:prstGeom>
-          <a:solidFill>
-            <a:srgbClr val="246B53"/>
-          </a:solidFill>
-          <a:ln>
-            <a:noFill/>
-          </a:ln>
-        </p:spPr>
-        <p:txBody>
-          <a:bodyPr rtlCol="0" anchor="ctr"/>
-          <a:lstStyle/>
-          <a:p>
-            <a:pPr algn="ctr"/>
-          </a:p>
-        </p:txBody>
-      </p:sp>
-      <p:sp>
-        <p:nvSpPr>
-          <p:cNvPr id="9" name="장식"/>
-          <p:cNvSpPr/>
-          <p:nvPr/>
-        </p:nvSpPr>
-        <p:spPr>
-          <a:xfrm rot="21114457">
-            <a:off x="11651521" y="1048887"/>
-            <a:ext cx="297834" cy="297834"/>
-          </a:xfrm>
-          <a:prstGeom prst="star5">
-            <a:avLst/>
-          </a:prstGeom>
-          <a:solidFill>
-            <a:srgbClr val="D0F1E6"/>
-          </a:solidFill>
-          <a:ln>
-            <a:noFill/>
-          </a:ln>
-        </p:spPr>
-        <p:txBody>
-          <a:bodyPr rtlCol="0" anchor="ctr"/>
-          <a:lstStyle/>
-          <a:p>
-            <a:pPr algn="ctr"/>
-          </a:p>
-        </p:txBody>
-      </p:sp>
-      <p:sp>
-        <p:nvSpPr>
-          <p:cNvPr id="10" name="장식"/>
-          <p:cNvSpPr/>
-          <p:nvPr/>
-        </p:nvSpPr>
-        <p:spPr>
-          <a:xfrm rot="21340827">
-            <a:off x="11563561" y="655126"/>
-            <a:ext cx="151951" cy="151951"/>
-          </a:xfrm>
-          <a:prstGeom prst="star5">
-            <a:avLst/>
-          </a:prstGeom>
-          <a:solidFill>
-            <a:srgbClr val="913B83"/>
-          </a:solidFill>
-          <a:ln>
-            <a:noFill/>
-          </a:ln>
-        </p:spPr>
-        <p:txBody>
-          <a:bodyPr rtlCol="0" anchor="ctr"/>
-          <a:lstStyle/>
-          <a:p>
-            <a:pPr algn="ctr"/>
-          </a:p>
-        </p:txBody>
-      </p:sp>
-      <p:sp>
-        <p:nvSpPr>
           <p:cNvPr id="2" name="Title 1"/>
           <p:cNvSpPr>
             <a:spLocks noGrp="1"/>
@@ -3960,7 +3570,7 @@
       </p:sp>
       <p:sp>
         <p:nvSpPr>
-          <p:cNvPr id="11" name="사진 자리"/>
+          <p:cNvPr id="5" name="사진 자리"/>
           <p:cNvSpPr/>
           <p:nvPr/>
         </p:nvSpPr>
@@ -4008,7 +3618,7 @@
       </p:sp>
       <p:graphicFrame>
         <p:nvGraphicFramePr>
-          <p:cNvPr id="12" name="표"/>
+          <p:cNvPr id="6" name="표"/>
           <p:cNvGraphicFramePr>
             <a:graphicFrameLocks noGrp="1"/>
           </p:cNvGraphicFramePr>
@@ -4682,180 +4292,6 @@
       </p:sp>
       <p:sp>
         <p:nvSpPr>
-          <p:cNvPr id="5" name="장식"/>
-          <p:cNvSpPr/>
-          <p:nvPr/>
-        </p:nvSpPr>
-        <p:spPr>
-          <a:xfrm rot="47073">
-            <a:off x="11538365" y="657714"/>
-            <a:ext cx="339662" cy="339662"/>
-          </a:xfrm>
-          <a:prstGeom prst="star5">
-            <a:avLst/>
-          </a:prstGeom>
-          <a:solidFill>
-            <a:srgbClr val="246B53"/>
-          </a:solidFill>
-          <a:ln>
-            <a:noFill/>
-          </a:ln>
-        </p:spPr>
-        <p:txBody>
-          <a:bodyPr rtlCol="0" anchor="ctr"/>
-          <a:lstStyle/>
-          <a:p>
-            <a:pPr algn="ctr"/>
-          </a:p>
-        </p:txBody>
-      </p:sp>
-      <p:sp>
-        <p:nvSpPr>
-          <p:cNvPr id="6" name="장식"/>
-          <p:cNvSpPr/>
-          <p:nvPr/>
-        </p:nvSpPr>
-        <p:spPr>
-          <a:xfrm rot="616000">
-            <a:off x="11746497" y="343890"/>
-            <a:ext cx="145122" cy="145122"/>
-          </a:xfrm>
-          <a:prstGeom prst="star5">
-            <a:avLst/>
-          </a:prstGeom>
-          <a:solidFill>
-            <a:srgbClr val="D0F1E6"/>
-          </a:solidFill>
-          <a:ln>
-            <a:noFill/>
-          </a:ln>
-        </p:spPr>
-        <p:txBody>
-          <a:bodyPr rtlCol="0" anchor="ctr"/>
-          <a:lstStyle/>
-          <a:p>
-            <a:pPr algn="ctr"/>
-          </a:p>
-        </p:txBody>
-      </p:sp>
-      <p:sp>
-        <p:nvSpPr>
-          <p:cNvPr id="7" name="장식"/>
-          <p:cNvSpPr/>
-          <p:nvPr/>
-        </p:nvSpPr>
-        <p:spPr>
-          <a:xfrm rot="291727">
-            <a:off x="10891282" y="851234"/>
-            <a:ext cx="259566" cy="259566"/>
-          </a:xfrm>
-          <a:prstGeom prst="star5">
-            <a:avLst/>
-          </a:prstGeom>
-          <a:solidFill>
-            <a:srgbClr val="913B83"/>
-          </a:solidFill>
-          <a:ln>
-            <a:noFill/>
-          </a:ln>
-        </p:spPr>
-        <p:txBody>
-          <a:bodyPr rtlCol="0" anchor="ctr"/>
-          <a:lstStyle/>
-          <a:p>
-            <a:pPr algn="ctr"/>
-          </a:p>
-        </p:txBody>
-      </p:sp>
-      <p:sp>
-        <p:nvSpPr>
-          <p:cNvPr id="8" name="장식"/>
-          <p:cNvSpPr/>
-          <p:nvPr/>
-        </p:nvSpPr>
-        <p:spPr>
-          <a:xfrm rot="486238">
-            <a:off x="11664833" y="1088349"/>
-            <a:ext cx="301133" cy="301133"/>
-          </a:xfrm>
-          <a:prstGeom prst="star5">
-            <a:avLst/>
-          </a:prstGeom>
-          <a:solidFill>
-            <a:srgbClr val="246B53"/>
-          </a:solidFill>
-          <a:ln>
-            <a:noFill/>
-          </a:ln>
-        </p:spPr>
-        <p:txBody>
-          <a:bodyPr rtlCol="0" anchor="ctr"/>
-          <a:lstStyle/>
-          <a:p>
-            <a:pPr algn="ctr"/>
-          </a:p>
-        </p:txBody>
-      </p:sp>
-      <p:sp>
-        <p:nvSpPr>
-          <p:cNvPr id="9" name="장식"/>
-          <p:cNvSpPr/>
-          <p:nvPr/>
-        </p:nvSpPr>
-        <p:spPr>
-          <a:xfrm rot="21114457">
-            <a:off x="11651521" y="1048887"/>
-            <a:ext cx="297834" cy="297834"/>
-          </a:xfrm>
-          <a:prstGeom prst="star5">
-            <a:avLst/>
-          </a:prstGeom>
-          <a:solidFill>
-            <a:srgbClr val="D0F1E6"/>
-          </a:solidFill>
-          <a:ln>
-            <a:noFill/>
-          </a:ln>
-        </p:spPr>
-        <p:txBody>
-          <a:bodyPr rtlCol="0" anchor="ctr"/>
-          <a:lstStyle/>
-          <a:p>
-            <a:pPr algn="ctr"/>
-          </a:p>
-        </p:txBody>
-      </p:sp>
-      <p:sp>
-        <p:nvSpPr>
-          <p:cNvPr id="10" name="장식"/>
-          <p:cNvSpPr/>
-          <p:nvPr/>
-        </p:nvSpPr>
-        <p:spPr>
-          <a:xfrm rot="21340827">
-            <a:off x="11563561" y="655126"/>
-            <a:ext cx="151951" cy="151951"/>
-          </a:xfrm>
-          <a:prstGeom prst="star5">
-            <a:avLst/>
-          </a:prstGeom>
-          <a:solidFill>
-            <a:srgbClr val="913B83"/>
-          </a:solidFill>
-          <a:ln>
-            <a:noFill/>
-          </a:ln>
-        </p:spPr>
-        <p:txBody>
-          <a:bodyPr rtlCol="0" anchor="ctr"/>
-          <a:lstStyle/>
-          <a:p>
-            <a:pPr algn="ctr"/>
-          </a:p>
-        </p:txBody>
-      </p:sp>
-      <p:sp>
-        <p:nvSpPr>
           <p:cNvPr id="2" name="Title 1"/>
           <p:cNvSpPr>
             <a:spLocks noGrp="1"/>
@@ -4894,7 +4330,7 @@
       </p:sp>
       <p:sp>
         <p:nvSpPr>
-          <p:cNvPr id="11" name="초대 글 칸"/>
+          <p:cNvPr id="5" name="초대 글 칸"/>
           <p:cNvSpPr/>
           <p:nvPr/>
         </p:nvSpPr>
@@ -4927,7 +4363,7 @@
       </p:sp>
       <p:sp>
         <p:nvSpPr>
-          <p:cNvPr id="12" name="초대 글"/>
+          <p:cNvPr id="6" name="초대 글"/>
           <p:cNvSpPr txBox="1"/>
           <p:nvPr/>
         </p:nvSpPr>
@@ -4958,7 +4394,7 @@
                   <a:srgbClr val="2B2B2B"/>
                 </a:solidFill>
               </a:rPr>
-              <a:t>소중한 분들을 초대합니다.</a:t>
+              <a:t>저희 아이의 첫 생일에 모십니다.</a:t>
             </a:r>
           </a:p>
           <a:p>
@@ -4988,22 +4424,7 @@
                   <a:srgbClr val="2B2B2B"/>
                 </a:solidFill>
               </a:rPr>
-              <a:t>저희 아기가 첫 번째 생일을 맞이했습니다.</a:t>
-            </a:r>
-          </a:p>
-          <a:p>
-            <a:pPr algn="ctr">
-              <a:lnSpc>
-                <a:spcPct val="140000"/>
-              </a:lnSpc>
-            </a:pPr>
-            <a:r>
-              <a:rPr sz="2000" b="0" i="0">
-                <a:solidFill>
-                  <a:srgbClr val="2B2B2B"/>
-                </a:solidFill>
-              </a:rPr>
-              <a:t>함께해 주시면 큰 기쁨이 되겠습니다.</a:t>
+              <a:t>오셔서 같이 밥 한 끼 해 주세요.</a:t>
             </a:r>
           </a:p>
           <a:p>
@@ -5124,180 +4545,6 @@
       </p:sp>
       <p:sp>
         <p:nvSpPr>
-          <p:cNvPr id="5" name="장식"/>
-          <p:cNvSpPr/>
-          <p:nvPr/>
-        </p:nvSpPr>
-        <p:spPr>
-          <a:xfrm rot="47073">
-            <a:off x="11538365" y="657714"/>
-            <a:ext cx="339662" cy="339662"/>
-          </a:xfrm>
-          <a:prstGeom prst="star5">
-            <a:avLst/>
-          </a:prstGeom>
-          <a:solidFill>
-            <a:srgbClr val="246B53"/>
-          </a:solidFill>
-          <a:ln>
-            <a:noFill/>
-          </a:ln>
-        </p:spPr>
-        <p:txBody>
-          <a:bodyPr rtlCol="0" anchor="ctr"/>
-          <a:lstStyle/>
-          <a:p>
-            <a:pPr algn="ctr"/>
-          </a:p>
-        </p:txBody>
-      </p:sp>
-      <p:sp>
-        <p:nvSpPr>
-          <p:cNvPr id="6" name="장식"/>
-          <p:cNvSpPr/>
-          <p:nvPr/>
-        </p:nvSpPr>
-        <p:spPr>
-          <a:xfrm rot="616000">
-            <a:off x="11746497" y="343890"/>
-            <a:ext cx="145122" cy="145122"/>
-          </a:xfrm>
-          <a:prstGeom prst="star5">
-            <a:avLst/>
-          </a:prstGeom>
-          <a:solidFill>
-            <a:srgbClr val="D0F1E6"/>
-          </a:solidFill>
-          <a:ln>
-            <a:noFill/>
-          </a:ln>
-        </p:spPr>
-        <p:txBody>
-          <a:bodyPr rtlCol="0" anchor="ctr"/>
-          <a:lstStyle/>
-          <a:p>
-            <a:pPr algn="ctr"/>
-          </a:p>
-        </p:txBody>
-      </p:sp>
-      <p:sp>
-        <p:nvSpPr>
-          <p:cNvPr id="7" name="장식"/>
-          <p:cNvSpPr/>
-          <p:nvPr/>
-        </p:nvSpPr>
-        <p:spPr>
-          <a:xfrm rot="291727">
-            <a:off x="10891282" y="851234"/>
-            <a:ext cx="259566" cy="259566"/>
-          </a:xfrm>
-          <a:prstGeom prst="star5">
-            <a:avLst/>
-          </a:prstGeom>
-          <a:solidFill>
-            <a:srgbClr val="913B83"/>
-          </a:solidFill>
-          <a:ln>
-            <a:noFill/>
-          </a:ln>
-        </p:spPr>
-        <p:txBody>
-          <a:bodyPr rtlCol="0" anchor="ctr"/>
-          <a:lstStyle/>
-          <a:p>
-            <a:pPr algn="ctr"/>
-          </a:p>
-        </p:txBody>
-      </p:sp>
-      <p:sp>
-        <p:nvSpPr>
-          <p:cNvPr id="8" name="장식"/>
-          <p:cNvSpPr/>
-          <p:nvPr/>
-        </p:nvSpPr>
-        <p:spPr>
-          <a:xfrm rot="486238">
-            <a:off x="11664833" y="1088349"/>
-            <a:ext cx="301133" cy="301133"/>
-          </a:xfrm>
-          <a:prstGeom prst="star5">
-            <a:avLst/>
-          </a:prstGeom>
-          <a:solidFill>
-            <a:srgbClr val="246B53"/>
-          </a:solidFill>
-          <a:ln>
-            <a:noFill/>
-          </a:ln>
-        </p:spPr>
-        <p:txBody>
-          <a:bodyPr rtlCol="0" anchor="ctr"/>
-          <a:lstStyle/>
-          <a:p>
-            <a:pPr algn="ctr"/>
-          </a:p>
-        </p:txBody>
-      </p:sp>
-      <p:sp>
-        <p:nvSpPr>
-          <p:cNvPr id="9" name="장식"/>
-          <p:cNvSpPr/>
-          <p:nvPr/>
-        </p:nvSpPr>
-        <p:spPr>
-          <a:xfrm rot="21114457">
-            <a:off x="11651521" y="1048887"/>
-            <a:ext cx="297834" cy="297834"/>
-          </a:xfrm>
-          <a:prstGeom prst="star5">
-            <a:avLst/>
-          </a:prstGeom>
-          <a:solidFill>
-            <a:srgbClr val="D0F1E6"/>
-          </a:solidFill>
-          <a:ln>
-            <a:noFill/>
-          </a:ln>
-        </p:spPr>
-        <p:txBody>
-          <a:bodyPr rtlCol="0" anchor="ctr"/>
-          <a:lstStyle/>
-          <a:p>
-            <a:pPr algn="ctr"/>
-          </a:p>
-        </p:txBody>
-      </p:sp>
-      <p:sp>
-        <p:nvSpPr>
-          <p:cNvPr id="10" name="장식"/>
-          <p:cNvSpPr/>
-          <p:nvPr/>
-        </p:nvSpPr>
-        <p:spPr>
-          <a:xfrm rot="21340827">
-            <a:off x="11563561" y="655126"/>
-            <a:ext cx="151951" cy="151951"/>
-          </a:xfrm>
-          <a:prstGeom prst="star5">
-            <a:avLst/>
-          </a:prstGeom>
-          <a:solidFill>
-            <a:srgbClr val="913B83"/>
-          </a:solidFill>
-          <a:ln>
-            <a:noFill/>
-          </a:ln>
-        </p:spPr>
-        <p:txBody>
-          <a:bodyPr rtlCol="0" anchor="ctr"/>
-          <a:lstStyle/>
-          <a:p>
-            <a:pPr algn="ctr"/>
-          </a:p>
-        </p:txBody>
-      </p:sp>
-      <p:sp>
-        <p:nvSpPr>
           <p:cNvPr id="2" name="Title 1"/>
           <p:cNvSpPr>
             <a:spLocks noGrp="1"/>
@@ -5336,7 +4583,7 @@
       </p:sp>
       <p:sp>
         <p:nvSpPr>
-          <p:cNvPr id="11" name="편지 칸"/>
+          <p:cNvPr id="5" name="편지 칸"/>
           <p:cNvSpPr/>
           <p:nvPr/>
         </p:nvSpPr>
@@ -5369,7 +4616,7 @@
       </p:sp>
       <p:sp>
         <p:nvSpPr>
-          <p:cNvPr id="12" name="편지 글"/>
+          <p:cNvPr id="6" name="편지 글"/>
           <p:cNvSpPr txBox="1"/>
           <p:nvPr/>
         </p:nvSpPr>
@@ -5551,180 +4798,6 @@
       </p:sp>
       <p:sp>
         <p:nvSpPr>
-          <p:cNvPr id="5" name="장식"/>
-          <p:cNvSpPr/>
-          <p:nvPr/>
-        </p:nvSpPr>
-        <p:spPr>
-          <a:xfrm rot="47073">
-            <a:off x="11538365" y="657714"/>
-            <a:ext cx="339662" cy="339662"/>
-          </a:xfrm>
-          <a:prstGeom prst="star5">
-            <a:avLst/>
-          </a:prstGeom>
-          <a:solidFill>
-            <a:srgbClr val="246B53"/>
-          </a:solidFill>
-          <a:ln>
-            <a:noFill/>
-          </a:ln>
-        </p:spPr>
-        <p:txBody>
-          <a:bodyPr rtlCol="0" anchor="ctr"/>
-          <a:lstStyle/>
-          <a:p>
-            <a:pPr algn="ctr"/>
-          </a:p>
-        </p:txBody>
-      </p:sp>
-      <p:sp>
-        <p:nvSpPr>
-          <p:cNvPr id="6" name="장식"/>
-          <p:cNvSpPr/>
-          <p:nvPr/>
-        </p:nvSpPr>
-        <p:spPr>
-          <a:xfrm rot="616000">
-            <a:off x="11746497" y="343890"/>
-            <a:ext cx="145122" cy="145122"/>
-          </a:xfrm>
-          <a:prstGeom prst="star5">
-            <a:avLst/>
-          </a:prstGeom>
-          <a:solidFill>
-            <a:srgbClr val="D0F1E6"/>
-          </a:solidFill>
-          <a:ln>
-            <a:noFill/>
-          </a:ln>
-        </p:spPr>
-        <p:txBody>
-          <a:bodyPr rtlCol="0" anchor="ctr"/>
-          <a:lstStyle/>
-          <a:p>
-            <a:pPr algn="ctr"/>
-          </a:p>
-        </p:txBody>
-      </p:sp>
-      <p:sp>
-        <p:nvSpPr>
-          <p:cNvPr id="7" name="장식"/>
-          <p:cNvSpPr/>
-          <p:nvPr/>
-        </p:nvSpPr>
-        <p:spPr>
-          <a:xfrm rot="291727">
-            <a:off x="10891282" y="851234"/>
-            <a:ext cx="259566" cy="259566"/>
-          </a:xfrm>
-          <a:prstGeom prst="star5">
-            <a:avLst/>
-          </a:prstGeom>
-          <a:solidFill>
-            <a:srgbClr val="913B83"/>
-          </a:solidFill>
-          <a:ln>
-            <a:noFill/>
-          </a:ln>
-        </p:spPr>
-        <p:txBody>
-          <a:bodyPr rtlCol="0" anchor="ctr"/>
-          <a:lstStyle/>
-          <a:p>
-            <a:pPr algn="ctr"/>
-          </a:p>
-        </p:txBody>
-      </p:sp>
-      <p:sp>
-        <p:nvSpPr>
-          <p:cNvPr id="8" name="장식"/>
-          <p:cNvSpPr/>
-          <p:nvPr/>
-        </p:nvSpPr>
-        <p:spPr>
-          <a:xfrm rot="486238">
-            <a:off x="11664833" y="1088349"/>
-            <a:ext cx="301133" cy="301133"/>
-          </a:xfrm>
-          <a:prstGeom prst="star5">
-            <a:avLst/>
-          </a:prstGeom>
-          <a:solidFill>
-            <a:srgbClr val="246B53"/>
-          </a:solidFill>
-          <a:ln>
-            <a:noFill/>
-          </a:ln>
-        </p:spPr>
-        <p:txBody>
-          <a:bodyPr rtlCol="0" anchor="ctr"/>
-          <a:lstStyle/>
-          <a:p>
-            <a:pPr algn="ctr"/>
-          </a:p>
-        </p:txBody>
-      </p:sp>
-      <p:sp>
-        <p:nvSpPr>
-          <p:cNvPr id="9" name="장식"/>
-          <p:cNvSpPr/>
-          <p:nvPr/>
-        </p:nvSpPr>
-        <p:spPr>
-          <a:xfrm rot="21114457">
-            <a:off x="11651521" y="1048887"/>
-            <a:ext cx="297834" cy="297834"/>
-          </a:xfrm>
-          <a:prstGeom prst="star5">
-            <a:avLst/>
-          </a:prstGeom>
-          <a:solidFill>
-            <a:srgbClr val="D0F1E6"/>
-          </a:solidFill>
-          <a:ln>
-            <a:noFill/>
-          </a:ln>
-        </p:spPr>
-        <p:txBody>
-          <a:bodyPr rtlCol="0" anchor="ctr"/>
-          <a:lstStyle/>
-          <a:p>
-            <a:pPr algn="ctr"/>
-          </a:p>
-        </p:txBody>
-      </p:sp>
-      <p:sp>
-        <p:nvSpPr>
-          <p:cNvPr id="10" name="장식"/>
-          <p:cNvSpPr/>
-          <p:nvPr/>
-        </p:nvSpPr>
-        <p:spPr>
-          <a:xfrm rot="21340827">
-            <a:off x="11563561" y="655126"/>
-            <a:ext cx="151951" cy="151951"/>
-          </a:xfrm>
-          <a:prstGeom prst="star5">
-            <a:avLst/>
-          </a:prstGeom>
-          <a:solidFill>
-            <a:srgbClr val="913B83"/>
-          </a:solidFill>
-          <a:ln>
-            <a:noFill/>
-          </a:ln>
-        </p:spPr>
-        <p:txBody>
-          <a:bodyPr rtlCol="0" anchor="ctr"/>
-          <a:lstStyle/>
-          <a:p>
-            <a:pPr algn="ctr"/>
-          </a:p>
-        </p:txBody>
-      </p:sp>
-      <p:sp>
-        <p:nvSpPr>
           <p:cNvPr id="2" name="Title 1"/>
           <p:cNvSpPr>
             <a:spLocks noGrp="1"/>
@@ -5763,7 +4836,7 @@
       </p:sp>
       <p:sp>
         <p:nvSpPr>
-          <p:cNvPr id="11" name="사진 자리"/>
+          <p:cNvPr id="5" name="사진 자리"/>
           <p:cNvSpPr/>
           <p:nvPr/>
         </p:nvSpPr>
@@ -5811,7 +4884,7 @@
       </p:sp>
       <p:sp>
         <p:nvSpPr>
-          <p:cNvPr id="12" name="사진 자리"/>
+          <p:cNvPr id="6" name="사진 자리"/>
           <p:cNvSpPr/>
           <p:nvPr/>
         </p:nvSpPr>
@@ -5859,7 +4932,7 @@
       </p:sp>
       <p:sp>
         <p:nvSpPr>
-          <p:cNvPr id="13" name="사진 자리"/>
+          <p:cNvPr id="7" name="사진 자리"/>
           <p:cNvSpPr/>
           <p:nvPr/>
         </p:nvSpPr>
@@ -5907,7 +4980,7 @@
       </p:sp>
       <p:sp>
         <p:nvSpPr>
-          <p:cNvPr id="14" name="사진 자리"/>
+          <p:cNvPr id="8" name="사진 자리"/>
           <p:cNvSpPr/>
           <p:nvPr/>
         </p:nvSpPr>
@@ -5955,7 +5028,7 @@
       </p:sp>
       <p:sp>
         <p:nvSpPr>
-          <p:cNvPr id="15" name="사진 자리"/>
+          <p:cNvPr id="9" name="사진 자리"/>
           <p:cNvSpPr/>
           <p:nvPr/>
         </p:nvSpPr>
@@ -6003,7 +5076,7 @@
       </p:sp>
       <p:sp>
         <p:nvSpPr>
-          <p:cNvPr id="16" name="사진 자리"/>
+          <p:cNvPr id="10" name="사진 자리"/>
           <p:cNvSpPr/>
           <p:nvPr/>
         </p:nvSpPr>
@@ -6051,7 +5124,7 @@
       </p:sp>
       <p:sp>
         <p:nvSpPr>
-          <p:cNvPr id="17" name="사진 자리"/>
+          <p:cNvPr id="11" name="사진 자리"/>
           <p:cNvSpPr/>
           <p:nvPr/>
         </p:nvSpPr>
@@ -6099,7 +5172,7 @@
       </p:sp>
       <p:sp>
         <p:nvSpPr>
-          <p:cNvPr id="18" name="사진 자리"/>
+          <p:cNvPr id="12" name="사진 자리"/>
           <p:cNvSpPr/>
           <p:nvPr/>
         </p:nvSpPr>
@@ -6156,14 +5229,6 @@
 <file path=ppt/slides/slide6.xml><?xml version="1.0" encoding="utf-8"?>
 <p:sld xmlns:a="http://schemas.openxmlformats.org/drawingml/2006/main" xmlns:p="http://schemas.openxmlformats.org/presentationml/2006/main" xmlns:r="http://schemas.openxmlformats.org/officeDocument/2006/relationships">
   <p:cSld>
-    <p:bg>
-      <p:bgPr>
-        <a:solidFill>
-          <a:srgbClr val="FFFFFF"/>
-        </a:solidFill>
-        <a:effectLst/>
-      </p:bgPr>
-    </p:bg>
     <p:spTree>
       <p:nvGrpSpPr>
         <p:cNvPr id="1" name=""/>
@@ -6171,238 +5236,30 @@
         <p:nvPr/>
       </p:nvGrpSpPr>
       <p:grpSpPr/>
-      <p:sp>
-        <p:nvSpPr>
-          <p:cNvPr id="3" name="장식"/>
-          <p:cNvSpPr/>
+      <p:pic>
+        <p:nvPicPr>
+          <p:cNvPr id="3" name="표지 그림" descr="birthday-19.jpg"/>
+          <p:cNvPicPr>
+            <a:picLocks noChangeAspect="1"/>
+          </p:cNvPicPr>
           <p:nvPr/>
-        </p:nvSpPr>
-        <p:spPr>
-          <a:xfrm>
-            <a:off x="7071183" y="-1714500"/>
-            <a:ext cx="7886700" cy="7886700"/>
-          </a:xfrm>
-          <a:prstGeom prst="ellipse">
+        </p:nvPicPr>
+        <p:blipFill>
+          <a:blip r:embed="rId2"/>
+          <a:stretch>
+            <a:fillRect/>
+          </a:stretch>
+        </p:blipFill>
+        <p:spPr>
+          <a:xfrm>
+            <a:off x="0" y="0"/>
+            <a:ext cx="12191695" cy="6858000"/>
+          </a:xfrm>
+          <a:prstGeom prst="rect">
             <a:avLst/>
           </a:prstGeom>
-          <a:solidFill>
-            <a:srgbClr val="D0F1E6"/>
-          </a:solidFill>
-          <a:ln>
-            <a:noFill/>
-          </a:ln>
-        </p:spPr>
-        <p:txBody>
-          <a:bodyPr rtlCol="0" anchor="ctr"/>
-          <a:lstStyle/>
-          <a:p>
-            <a:pPr algn="ctr"/>
-          </a:p>
-        </p:txBody>
-      </p:sp>
-      <p:sp>
-        <p:nvSpPr>
-          <p:cNvPr id="4" name="장식"/>
-          <p:cNvSpPr/>
-          <p:nvPr/>
-        </p:nvSpPr>
-        <p:spPr>
-          <a:xfrm>
-            <a:off x="9509522" y="3977639"/>
-            <a:ext cx="3429000" cy="3429000"/>
-          </a:xfrm>
-          <a:prstGeom prst="ellipse">
-            <a:avLst/>
-          </a:prstGeom>
-          <a:solidFill>
-            <a:srgbClr val="246B53"/>
-          </a:solidFill>
-          <a:ln>
-            <a:noFill/>
-          </a:ln>
-        </p:spPr>
-        <p:txBody>
-          <a:bodyPr rtlCol="0" anchor="ctr"/>
-          <a:lstStyle/>
-          <a:p>
-            <a:pPr algn="ctr"/>
-          </a:p>
-        </p:txBody>
-      </p:sp>
-      <p:sp>
-        <p:nvSpPr>
-          <p:cNvPr id="5" name="장식"/>
-          <p:cNvSpPr/>
-          <p:nvPr/>
-        </p:nvSpPr>
-        <p:spPr>
-          <a:xfrm rot="47073">
-            <a:off x="10370041" y="1303642"/>
-            <a:ext cx="972669" cy="972669"/>
-          </a:xfrm>
-          <a:prstGeom prst="star5">
-            <a:avLst/>
-          </a:prstGeom>
-          <a:solidFill>
-            <a:srgbClr val="246B53"/>
-          </a:solidFill>
-          <a:ln>
-            <a:noFill/>
-          </a:ln>
-        </p:spPr>
-        <p:txBody>
-          <a:bodyPr rtlCol="0" anchor="ctr"/>
-          <a:lstStyle/>
-          <a:p>
-            <a:pPr algn="ctr"/>
-          </a:p>
-        </p:txBody>
-      </p:sp>
-      <p:sp>
-        <p:nvSpPr>
-          <p:cNvPr id="6" name="장식"/>
-          <p:cNvSpPr/>
-          <p:nvPr/>
-        </p:nvSpPr>
-        <p:spPr>
-          <a:xfrm rot="616000">
-            <a:off x="10966056" y="404965"/>
-            <a:ext cx="415579" cy="415579"/>
-          </a:xfrm>
-          <a:prstGeom prst="star5">
-            <a:avLst/>
-          </a:prstGeom>
-          <a:solidFill>
-            <a:srgbClr val="D0F1E6"/>
-          </a:solidFill>
-          <a:ln>
-            <a:noFill/>
-          </a:ln>
-        </p:spPr>
-        <p:txBody>
-          <a:bodyPr rtlCol="0" anchor="ctr"/>
-          <a:lstStyle/>
-          <a:p>
-            <a:pPr algn="ctr"/>
-          </a:p>
-        </p:txBody>
-      </p:sp>
-      <p:sp>
-        <p:nvSpPr>
-          <p:cNvPr id="7" name="장식"/>
-          <p:cNvSpPr/>
-          <p:nvPr/>
-        </p:nvSpPr>
-        <p:spPr>
-          <a:xfrm rot="291727">
-            <a:off x="8517029" y="1857812"/>
-            <a:ext cx="743304" cy="743304"/>
-          </a:xfrm>
-          <a:prstGeom prst="star5">
-            <a:avLst/>
-          </a:prstGeom>
-          <a:solidFill>
-            <a:srgbClr val="913B83"/>
-          </a:solidFill>
-          <a:ln>
-            <a:noFill/>
-          </a:ln>
-        </p:spPr>
-        <p:txBody>
-          <a:bodyPr rtlCol="0" anchor="ctr"/>
-          <a:lstStyle/>
-          <a:p>
-            <a:pPr algn="ctr"/>
-          </a:p>
-        </p:txBody>
-      </p:sp>
-      <p:sp>
-        <p:nvSpPr>
-          <p:cNvPr id="8" name="장식"/>
-          <p:cNvSpPr/>
-          <p:nvPr/>
-        </p:nvSpPr>
-        <p:spPr>
-          <a:xfrm rot="486238">
-            <a:off x="10732199" y="2536825"/>
-            <a:ext cx="862336" cy="862336"/>
-          </a:xfrm>
-          <a:prstGeom prst="star5">
-            <a:avLst/>
-          </a:prstGeom>
-          <a:solidFill>
-            <a:srgbClr val="246B53"/>
-          </a:solidFill>
-          <a:ln>
-            <a:noFill/>
-          </a:ln>
-        </p:spPr>
-        <p:txBody>
-          <a:bodyPr rtlCol="0" anchor="ctr"/>
-          <a:lstStyle/>
-          <a:p>
-            <a:pPr algn="ctr"/>
-          </a:p>
-        </p:txBody>
-      </p:sp>
-      <p:sp>
-        <p:nvSpPr>
-          <p:cNvPr id="9" name="장식"/>
-          <p:cNvSpPr/>
-          <p:nvPr/>
-        </p:nvSpPr>
-        <p:spPr>
-          <a:xfrm rot="21114457">
-            <a:off x="10694079" y="2423818"/>
-            <a:ext cx="852890" cy="852890"/>
-          </a:xfrm>
-          <a:prstGeom prst="star5">
-            <a:avLst/>
-          </a:prstGeom>
-          <a:solidFill>
-            <a:srgbClr val="D0F1E6"/>
-          </a:solidFill>
-          <a:ln>
-            <a:noFill/>
-          </a:ln>
-        </p:spPr>
-        <p:txBody>
-          <a:bodyPr rtlCol="0" anchor="ctr"/>
-          <a:lstStyle/>
-          <a:p>
-            <a:pPr algn="ctr"/>
-          </a:p>
-        </p:txBody>
-      </p:sp>
-      <p:sp>
-        <p:nvSpPr>
-          <p:cNvPr id="10" name="장식"/>
-          <p:cNvSpPr/>
-          <p:nvPr/>
-        </p:nvSpPr>
-        <p:spPr>
-          <a:xfrm rot="21340827">
-            <a:off x="10442192" y="1296230"/>
-            <a:ext cx="435134" cy="435134"/>
-          </a:xfrm>
-          <a:prstGeom prst="star5">
-            <a:avLst/>
-          </a:prstGeom>
-          <a:solidFill>
-            <a:srgbClr val="913B83"/>
-          </a:solidFill>
-          <a:ln>
-            <a:noFill/>
-          </a:ln>
-        </p:spPr>
-        <p:txBody>
-          <a:bodyPr rtlCol="0" anchor="ctr"/>
-          <a:lstStyle/>
-          <a:p>
-            <a:pPr algn="ctr"/>
-          </a:p>
-        </p:txBody>
-      </p:sp>
+        </p:spPr>
+      </p:pic>
       <p:sp>
         <p:nvSpPr>
           <p:cNvPr id="2" name="Title 1"/>
@@ -6416,7 +5273,7 @@
         <p:spPr>
           <a:xfrm>
             <a:off x="853418" y="2057400"/>
-            <a:ext cx="6705432" cy="1463040"/>
+            <a:ext cx="6095847" cy="1554480"/>
           </a:xfrm>
         </p:spPr>
         <p:txBody>
@@ -6436,20 +5293,20 @@
                   <a:srgbClr val="143D30"/>
                 </a:solidFill>
               </a:rPr>
-              <a:t>함께해 주셔서 감사합니다</a:t>
-            </a:r>
-          </a:p>
-        </p:txBody>
-      </p:sp>
-      <p:sp>
-        <p:nvSpPr>
-          <p:cNvPr id="11" name="한 줄 문구"/>
+              <a:t>와 주셔서 고맙습니다</a:t>
+            </a:r>
+          </a:p>
+        </p:txBody>
+      </p:sp>
+      <p:sp>
+        <p:nvSpPr>
+          <p:cNvPr id="4" name="한 줄 문구"/>
           <p:cNvSpPr txBox="1"/>
           <p:nvPr/>
         </p:nvSpPr>
         <p:spPr>
           <a:xfrm>
-            <a:off x="853418" y="3611880"/>
+            <a:off x="853418" y="3749039"/>
             <a:ext cx="6095847" cy="822960"/>
           </a:xfrm>
           <a:prstGeom prst="rect">
@@ -6474,20 +5331,20 @@
                   <a:srgbClr val="143D30"/>
                 </a:solidFill>
               </a:rPr>
-              <a:t>첫 번째 생일을 축하해 주셔서 고맙습니다</a:t>
-            </a:r>
-          </a:p>
-        </p:txBody>
-      </p:sp>
-      <p:sp>
-        <p:nvSpPr>
-          <p:cNvPr id="12" name="안내 문구"/>
+              <a:t>아이가 한 살이 되었습니다</a:t>
+            </a:r>
+          </a:p>
+        </p:txBody>
+      </p:sp>
+      <p:sp>
+        <p:nvSpPr>
+          <p:cNvPr id="5" name="안내 문구"/>
           <p:cNvSpPr txBox="1"/>
           <p:nvPr/>
         </p:nvSpPr>
         <p:spPr>
           <a:xfrm>
-            <a:off x="853418" y="4480560"/>
+            <a:off x="853418" y="4617720"/>
             <a:ext cx="6095847" cy="914400"/>
           </a:xfrm>
           <a:prstGeom prst="rect">

--- a/public/fun/pack/pptx/birthday/돌잔치_19_감사인사중심_반딧불마을.pptx
+++ b/public/fun/pack/pptx/birthday/돌잔치_19_감사인사중심_반딧불마을.pptx
@@ -3347,7 +3347,7 @@
             <a:r>
               <a:rPr sz="4000" b="1" i="0">
                 <a:solidFill>
-                  <a:srgbClr val="143D30"/>
+                  <a:srgbClr val="115F45"/>
                 </a:solidFill>
               </a:rPr>
               <a:t>첫 번째 생일</a:t>
@@ -3385,7 +3385,7 @@
             <a:r>
               <a:rPr sz="1700" b="0" i="1">
                 <a:solidFill>
-                  <a:srgbClr val="143D30"/>
+                  <a:srgbClr val="115F45"/>
                 </a:solidFill>
               </a:rPr>
               <a:t>바쁘신 중에도 와 주셔서 고맙습니다</a:t>
@@ -3487,7 +3487,7 @@
             <a:avLst/>
           </a:prstGeom>
           <a:solidFill>
-            <a:srgbClr val="D0F1E6"/>
+            <a:srgbClr val="D1FAEC"/>
           </a:solidFill>
           <a:ln>
             <a:noFill/>
@@ -3516,7 +3516,7 @@
             <a:avLst/>
           </a:prstGeom>
           <a:solidFill>
-            <a:srgbClr val="246B53"/>
+            <a:srgbClr val="26C590"/>
           </a:solidFill>
           <a:ln>
             <a:noFill/>
@@ -3560,7 +3560,7 @@
             <a:r>
               <a:rPr sz="3000" b="1" i="0">
                 <a:solidFill>
-                  <a:srgbClr val="143D30"/>
+                  <a:srgbClr val="115F45"/>
                 </a:solidFill>
               </a:rPr>
               <a:t>우리 아기를 소개합니다</a:t>
@@ -3585,11 +3585,11 @@
             </a:avLst>
           </a:prstGeom>
           <a:solidFill>
-            <a:srgbClr val="D0F1E6"/>
+            <a:srgbClr val="D1FAEC"/>
           </a:solidFill>
           <a:ln w="19050">
             <a:solidFill>
-              <a:srgbClr val="246B53"/>
+              <a:srgbClr val="26C590"/>
             </a:solidFill>
             <a:prstDash val="dash"/>
           </a:ln>
@@ -3608,7 +3608,7 @@
             <a:r>
               <a:rPr sz="1400" b="0" i="0">
                 <a:solidFill>
-                  <a:srgbClr val="143D30"/>
+                  <a:srgbClr val="115F45"/>
                 </a:solidFill>
               </a:rPr>
               <a:t>아기 사진을 넣어 주세요</a:t>
@@ -3648,7 +3648,7 @@
                       <a:r>
                         <a:rPr sz="1500" b="1">
                           <a:solidFill>
-                            <a:srgbClr val="143D30"/>
+                            <a:srgbClr val="115F45"/>
                           </a:solidFill>
                         </a:rPr>
                         <a:t>이름</a:t>
@@ -3658,30 +3658,30 @@
                   <a:tcPr anchor="ctr" marL="73152" marR="73152">
                     <a:lnL w="9525" cap="flat" cmpd="sng" algn="ctr">
                       <a:solidFill>
-                        <a:srgbClr val="D0F1E6"/>
+                        <a:srgbClr val="D1FAEC"/>
                       </a:solidFill>
                       <a:prstDash val="solid"/>
                     </a:lnL>
                     <a:lnR w="9525" cap="flat" cmpd="sng" algn="ctr">
                       <a:solidFill>
-                        <a:srgbClr val="D0F1E6"/>
+                        <a:srgbClr val="D1FAEC"/>
                       </a:solidFill>
                       <a:prstDash val="solid"/>
                     </a:lnR>
                     <a:lnT w="9525" cap="flat" cmpd="sng" algn="ctr">
                       <a:solidFill>
-                        <a:srgbClr val="D0F1E6"/>
+                        <a:srgbClr val="D1FAEC"/>
                       </a:solidFill>
                       <a:prstDash val="solid"/>
                     </a:lnT>
                     <a:lnB w="9525" cap="flat" cmpd="sng" algn="ctr">
                       <a:solidFill>
-                        <a:srgbClr val="D0F1E6"/>
+                        <a:srgbClr val="D1FAEC"/>
                       </a:solidFill>
                       <a:prstDash val="solid"/>
                     </a:lnB>
                     <a:solidFill>
-                      <a:srgbClr val="D0F1E6"/>
+                      <a:srgbClr val="D1FAEC"/>
                     </a:solidFill>
                   </a:tcPr>
                 </a:tc>
@@ -3704,30 +3704,30 @@
                   <a:tcPr anchor="ctr" marL="73152" marR="73152">
                     <a:lnL w="9525" cap="flat" cmpd="sng" algn="ctr">
                       <a:solidFill>
-                        <a:srgbClr val="D0F1E6"/>
+                        <a:srgbClr val="D1FAEC"/>
                       </a:solidFill>
                       <a:prstDash val="solid"/>
                     </a:lnL>
                     <a:lnR w="9525" cap="flat" cmpd="sng" algn="ctr">
                       <a:solidFill>
-                        <a:srgbClr val="D0F1E6"/>
+                        <a:srgbClr val="D1FAEC"/>
                       </a:solidFill>
                       <a:prstDash val="solid"/>
                     </a:lnR>
                     <a:lnT w="9525" cap="flat" cmpd="sng" algn="ctr">
                       <a:solidFill>
-                        <a:srgbClr val="D0F1E6"/>
+                        <a:srgbClr val="D1FAEC"/>
                       </a:solidFill>
                       <a:prstDash val="solid"/>
                     </a:lnT>
                     <a:lnB w="9525" cap="flat" cmpd="sng" algn="ctr">
                       <a:solidFill>
-                        <a:srgbClr val="D0F1E6"/>
+                        <a:srgbClr val="D1FAEC"/>
                       </a:solidFill>
                       <a:prstDash val="solid"/>
                     </a:lnB>
                     <a:solidFill>
-                      <a:srgbClr val="F0FAF6"/>
+                      <a:srgbClr val="EEFCF7"/>
                     </a:solidFill>
                   </a:tcPr>
                 </a:tc>
@@ -3742,7 +3742,7 @@
                       <a:r>
                         <a:rPr sz="1500" b="1">
                           <a:solidFill>
-                            <a:srgbClr val="143D30"/>
+                            <a:srgbClr val="115F45"/>
                           </a:solidFill>
                         </a:rPr>
                         <a:t>생일</a:t>
@@ -3752,30 +3752,30 @@
                   <a:tcPr anchor="ctr" marL="73152" marR="73152">
                     <a:lnL w="9525" cap="flat" cmpd="sng" algn="ctr">
                       <a:solidFill>
-                        <a:srgbClr val="D0F1E6"/>
+                        <a:srgbClr val="D1FAEC"/>
                       </a:solidFill>
                       <a:prstDash val="solid"/>
                     </a:lnL>
                     <a:lnR w="9525" cap="flat" cmpd="sng" algn="ctr">
                       <a:solidFill>
-                        <a:srgbClr val="D0F1E6"/>
+                        <a:srgbClr val="D1FAEC"/>
                       </a:solidFill>
                       <a:prstDash val="solid"/>
                     </a:lnR>
                     <a:lnT w="9525" cap="flat" cmpd="sng" algn="ctr">
                       <a:solidFill>
-                        <a:srgbClr val="D0F1E6"/>
+                        <a:srgbClr val="D1FAEC"/>
                       </a:solidFill>
                       <a:prstDash val="solid"/>
                     </a:lnT>
                     <a:lnB w="9525" cap="flat" cmpd="sng" algn="ctr">
                       <a:solidFill>
-                        <a:srgbClr val="D0F1E6"/>
+                        <a:srgbClr val="D1FAEC"/>
                       </a:solidFill>
                       <a:prstDash val="solid"/>
                     </a:lnB>
                     <a:solidFill>
-                      <a:srgbClr val="D0F1E6"/>
+                      <a:srgbClr val="D1FAEC"/>
                     </a:solidFill>
                   </a:tcPr>
                 </a:tc>
@@ -3798,25 +3798,25 @@
                   <a:tcPr anchor="ctr" marL="73152" marR="73152">
                     <a:lnL w="9525" cap="flat" cmpd="sng" algn="ctr">
                       <a:solidFill>
-                        <a:srgbClr val="D0F1E6"/>
+                        <a:srgbClr val="D1FAEC"/>
                       </a:solidFill>
                       <a:prstDash val="solid"/>
                     </a:lnL>
                     <a:lnR w="9525" cap="flat" cmpd="sng" algn="ctr">
                       <a:solidFill>
-                        <a:srgbClr val="D0F1E6"/>
+                        <a:srgbClr val="D1FAEC"/>
                       </a:solidFill>
                       <a:prstDash val="solid"/>
                     </a:lnR>
                     <a:lnT w="9525" cap="flat" cmpd="sng" algn="ctr">
                       <a:solidFill>
-                        <a:srgbClr val="D0F1E6"/>
+                        <a:srgbClr val="D1FAEC"/>
                       </a:solidFill>
                       <a:prstDash val="solid"/>
                     </a:lnT>
                     <a:lnB w="9525" cap="flat" cmpd="sng" algn="ctr">
                       <a:solidFill>
-                        <a:srgbClr val="D0F1E6"/>
+                        <a:srgbClr val="D1FAEC"/>
                       </a:solidFill>
                       <a:prstDash val="solid"/>
                     </a:lnB>
@@ -3836,7 +3836,7 @@
                       <a:r>
                         <a:rPr sz="1500" b="1">
                           <a:solidFill>
-                            <a:srgbClr val="143D30"/>
+                            <a:srgbClr val="115F45"/>
                           </a:solidFill>
                         </a:rPr>
                         <a:t>키 · 몸무게</a:t>
@@ -3846,30 +3846,30 @@
                   <a:tcPr anchor="ctr" marL="73152" marR="73152">
                     <a:lnL w="9525" cap="flat" cmpd="sng" algn="ctr">
                       <a:solidFill>
-                        <a:srgbClr val="D0F1E6"/>
+                        <a:srgbClr val="D1FAEC"/>
                       </a:solidFill>
                       <a:prstDash val="solid"/>
                     </a:lnL>
                     <a:lnR w="9525" cap="flat" cmpd="sng" algn="ctr">
                       <a:solidFill>
-                        <a:srgbClr val="D0F1E6"/>
+                        <a:srgbClr val="D1FAEC"/>
                       </a:solidFill>
                       <a:prstDash val="solid"/>
                     </a:lnR>
                     <a:lnT w="9525" cap="flat" cmpd="sng" algn="ctr">
                       <a:solidFill>
-                        <a:srgbClr val="D0F1E6"/>
+                        <a:srgbClr val="D1FAEC"/>
                       </a:solidFill>
                       <a:prstDash val="solid"/>
                     </a:lnT>
                     <a:lnB w="9525" cap="flat" cmpd="sng" algn="ctr">
                       <a:solidFill>
-                        <a:srgbClr val="D0F1E6"/>
+                        <a:srgbClr val="D1FAEC"/>
                       </a:solidFill>
                       <a:prstDash val="solid"/>
                     </a:lnB>
                     <a:solidFill>
-                      <a:srgbClr val="D0F1E6"/>
+                      <a:srgbClr val="D1FAEC"/>
                     </a:solidFill>
                   </a:tcPr>
                 </a:tc>
@@ -3892,30 +3892,30 @@
                   <a:tcPr anchor="ctr" marL="73152" marR="73152">
                     <a:lnL w="9525" cap="flat" cmpd="sng" algn="ctr">
                       <a:solidFill>
-                        <a:srgbClr val="D0F1E6"/>
+                        <a:srgbClr val="D1FAEC"/>
                       </a:solidFill>
                       <a:prstDash val="solid"/>
                     </a:lnL>
                     <a:lnR w="9525" cap="flat" cmpd="sng" algn="ctr">
                       <a:solidFill>
-                        <a:srgbClr val="D0F1E6"/>
+                        <a:srgbClr val="D1FAEC"/>
                       </a:solidFill>
                       <a:prstDash val="solid"/>
                     </a:lnR>
                     <a:lnT w="9525" cap="flat" cmpd="sng" algn="ctr">
                       <a:solidFill>
-                        <a:srgbClr val="D0F1E6"/>
+                        <a:srgbClr val="D1FAEC"/>
                       </a:solidFill>
                       <a:prstDash val="solid"/>
                     </a:lnT>
                     <a:lnB w="9525" cap="flat" cmpd="sng" algn="ctr">
                       <a:solidFill>
-                        <a:srgbClr val="D0F1E6"/>
+                        <a:srgbClr val="D1FAEC"/>
                       </a:solidFill>
                       <a:prstDash val="solid"/>
                     </a:lnB>
                     <a:solidFill>
-                      <a:srgbClr val="F0FAF6"/>
+                      <a:srgbClr val="EEFCF7"/>
                     </a:solidFill>
                   </a:tcPr>
                 </a:tc>
@@ -3930,7 +3930,7 @@
                       <a:r>
                         <a:rPr sz="1500" b="1">
                           <a:solidFill>
-                            <a:srgbClr val="143D30"/>
+                            <a:srgbClr val="115F45"/>
                           </a:solidFill>
                         </a:rPr>
                         <a:t>좋아하는 것</a:t>
@@ -3940,30 +3940,30 @@
                   <a:tcPr anchor="ctr" marL="73152" marR="73152">
                     <a:lnL w="9525" cap="flat" cmpd="sng" algn="ctr">
                       <a:solidFill>
-                        <a:srgbClr val="D0F1E6"/>
+                        <a:srgbClr val="D1FAEC"/>
                       </a:solidFill>
                       <a:prstDash val="solid"/>
                     </a:lnL>
                     <a:lnR w="9525" cap="flat" cmpd="sng" algn="ctr">
                       <a:solidFill>
-                        <a:srgbClr val="D0F1E6"/>
+                        <a:srgbClr val="D1FAEC"/>
                       </a:solidFill>
                       <a:prstDash val="solid"/>
                     </a:lnR>
                     <a:lnT w="9525" cap="flat" cmpd="sng" algn="ctr">
                       <a:solidFill>
-                        <a:srgbClr val="D0F1E6"/>
+                        <a:srgbClr val="D1FAEC"/>
                       </a:solidFill>
                       <a:prstDash val="solid"/>
                     </a:lnT>
                     <a:lnB w="9525" cap="flat" cmpd="sng" algn="ctr">
                       <a:solidFill>
-                        <a:srgbClr val="D0F1E6"/>
+                        <a:srgbClr val="D1FAEC"/>
                       </a:solidFill>
                       <a:prstDash val="solid"/>
                     </a:lnB>
                     <a:solidFill>
-                      <a:srgbClr val="D0F1E6"/>
+                      <a:srgbClr val="D1FAEC"/>
                     </a:solidFill>
                   </a:tcPr>
                 </a:tc>
@@ -3986,25 +3986,25 @@
                   <a:tcPr anchor="ctr" marL="73152" marR="73152">
                     <a:lnL w="9525" cap="flat" cmpd="sng" algn="ctr">
                       <a:solidFill>
-                        <a:srgbClr val="D0F1E6"/>
+                        <a:srgbClr val="D1FAEC"/>
                       </a:solidFill>
                       <a:prstDash val="solid"/>
                     </a:lnL>
                     <a:lnR w="9525" cap="flat" cmpd="sng" algn="ctr">
                       <a:solidFill>
-                        <a:srgbClr val="D0F1E6"/>
+                        <a:srgbClr val="D1FAEC"/>
                       </a:solidFill>
                       <a:prstDash val="solid"/>
                     </a:lnR>
                     <a:lnT w="9525" cap="flat" cmpd="sng" algn="ctr">
                       <a:solidFill>
-                        <a:srgbClr val="D0F1E6"/>
+                        <a:srgbClr val="D1FAEC"/>
                       </a:solidFill>
                       <a:prstDash val="solid"/>
                     </a:lnT>
                     <a:lnB w="9525" cap="flat" cmpd="sng" algn="ctr">
                       <a:solidFill>
-                        <a:srgbClr val="D0F1E6"/>
+                        <a:srgbClr val="D1FAEC"/>
                       </a:solidFill>
                       <a:prstDash val="solid"/>
                     </a:lnB>
@@ -4024,7 +4024,7 @@
                       <a:r>
                         <a:rPr sz="1500" b="1">
                           <a:solidFill>
-                            <a:srgbClr val="143D30"/>
+                            <a:srgbClr val="115F45"/>
                           </a:solidFill>
                         </a:rPr>
                         <a:t>별명</a:t>
@@ -4034,30 +4034,30 @@
                   <a:tcPr anchor="ctr" marL="73152" marR="73152">
                     <a:lnL w="9525" cap="flat" cmpd="sng" algn="ctr">
                       <a:solidFill>
-                        <a:srgbClr val="D0F1E6"/>
+                        <a:srgbClr val="D1FAEC"/>
                       </a:solidFill>
                       <a:prstDash val="solid"/>
                     </a:lnL>
                     <a:lnR w="9525" cap="flat" cmpd="sng" algn="ctr">
                       <a:solidFill>
-                        <a:srgbClr val="D0F1E6"/>
+                        <a:srgbClr val="D1FAEC"/>
                       </a:solidFill>
                       <a:prstDash val="solid"/>
                     </a:lnR>
                     <a:lnT w="9525" cap="flat" cmpd="sng" algn="ctr">
                       <a:solidFill>
-                        <a:srgbClr val="D0F1E6"/>
+                        <a:srgbClr val="D1FAEC"/>
                       </a:solidFill>
                       <a:prstDash val="solid"/>
                     </a:lnT>
                     <a:lnB w="9525" cap="flat" cmpd="sng" algn="ctr">
                       <a:solidFill>
-                        <a:srgbClr val="D0F1E6"/>
+                        <a:srgbClr val="D1FAEC"/>
                       </a:solidFill>
                       <a:prstDash val="solid"/>
                     </a:lnB>
                     <a:solidFill>
-                      <a:srgbClr val="D0F1E6"/>
+                      <a:srgbClr val="D1FAEC"/>
                     </a:solidFill>
                   </a:tcPr>
                 </a:tc>
@@ -4080,30 +4080,30 @@
                   <a:tcPr anchor="ctr" marL="73152" marR="73152">
                     <a:lnL w="9525" cap="flat" cmpd="sng" algn="ctr">
                       <a:solidFill>
-                        <a:srgbClr val="D0F1E6"/>
+                        <a:srgbClr val="D1FAEC"/>
                       </a:solidFill>
                       <a:prstDash val="solid"/>
                     </a:lnL>
                     <a:lnR w="9525" cap="flat" cmpd="sng" algn="ctr">
                       <a:solidFill>
-                        <a:srgbClr val="D0F1E6"/>
+                        <a:srgbClr val="D1FAEC"/>
                       </a:solidFill>
                       <a:prstDash val="solid"/>
                     </a:lnR>
                     <a:lnT w="9525" cap="flat" cmpd="sng" algn="ctr">
                       <a:solidFill>
-                        <a:srgbClr val="D0F1E6"/>
+                        <a:srgbClr val="D1FAEC"/>
                       </a:solidFill>
                       <a:prstDash val="solid"/>
                     </a:lnT>
                     <a:lnB w="9525" cap="flat" cmpd="sng" algn="ctr">
                       <a:solidFill>
-                        <a:srgbClr val="D0F1E6"/>
+                        <a:srgbClr val="D1FAEC"/>
                       </a:solidFill>
                       <a:prstDash val="solid"/>
                     </a:lnB>
                     <a:solidFill>
-                      <a:srgbClr val="F0FAF6"/>
+                      <a:srgbClr val="EEFCF7"/>
                     </a:solidFill>
                   </a:tcPr>
                 </a:tc>
@@ -4118,7 +4118,7 @@
                       <a:r>
                         <a:rPr sz="1500" b="1">
                           <a:solidFill>
-                            <a:srgbClr val="143D30"/>
+                            <a:srgbClr val="115F45"/>
                           </a:solidFill>
                         </a:rPr>
                         <a:t>부모의 마음</a:t>
@@ -4128,30 +4128,30 @@
                   <a:tcPr anchor="ctr" marL="73152" marR="73152">
                     <a:lnL w="9525" cap="flat" cmpd="sng" algn="ctr">
                       <a:solidFill>
-                        <a:srgbClr val="D0F1E6"/>
+                        <a:srgbClr val="D1FAEC"/>
                       </a:solidFill>
                       <a:prstDash val="solid"/>
                     </a:lnL>
                     <a:lnR w="9525" cap="flat" cmpd="sng" algn="ctr">
                       <a:solidFill>
-                        <a:srgbClr val="D0F1E6"/>
+                        <a:srgbClr val="D1FAEC"/>
                       </a:solidFill>
                       <a:prstDash val="solid"/>
                     </a:lnR>
                     <a:lnT w="9525" cap="flat" cmpd="sng" algn="ctr">
                       <a:solidFill>
-                        <a:srgbClr val="D0F1E6"/>
+                        <a:srgbClr val="D1FAEC"/>
                       </a:solidFill>
                       <a:prstDash val="solid"/>
                     </a:lnT>
                     <a:lnB w="9525" cap="flat" cmpd="sng" algn="ctr">
                       <a:solidFill>
-                        <a:srgbClr val="D0F1E6"/>
+                        <a:srgbClr val="D1FAEC"/>
                       </a:solidFill>
                       <a:prstDash val="solid"/>
                     </a:lnB>
                     <a:solidFill>
-                      <a:srgbClr val="D0F1E6"/>
+                      <a:srgbClr val="D1FAEC"/>
                     </a:solidFill>
                   </a:tcPr>
                 </a:tc>
@@ -4174,25 +4174,25 @@
                   <a:tcPr anchor="ctr" marL="73152" marR="73152">
                     <a:lnL w="9525" cap="flat" cmpd="sng" algn="ctr">
                       <a:solidFill>
-                        <a:srgbClr val="D0F1E6"/>
+                        <a:srgbClr val="D1FAEC"/>
                       </a:solidFill>
                       <a:prstDash val="solid"/>
                     </a:lnL>
                     <a:lnR w="9525" cap="flat" cmpd="sng" algn="ctr">
                       <a:solidFill>
-                        <a:srgbClr val="D0F1E6"/>
+                        <a:srgbClr val="D1FAEC"/>
                       </a:solidFill>
                       <a:prstDash val="solid"/>
                     </a:lnR>
                     <a:lnT w="9525" cap="flat" cmpd="sng" algn="ctr">
                       <a:solidFill>
-                        <a:srgbClr val="D0F1E6"/>
+                        <a:srgbClr val="D1FAEC"/>
                       </a:solidFill>
                       <a:prstDash val="solid"/>
                     </a:lnT>
                     <a:lnB w="9525" cap="flat" cmpd="sng" algn="ctr">
                       <a:solidFill>
-                        <a:srgbClr val="D0F1E6"/>
+                        <a:srgbClr val="D1FAEC"/>
                       </a:solidFill>
                       <a:prstDash val="solid"/>
                     </a:lnB>
@@ -4247,7 +4247,7 @@
             <a:avLst/>
           </a:prstGeom>
           <a:solidFill>
-            <a:srgbClr val="D0F1E6"/>
+            <a:srgbClr val="D1FAEC"/>
           </a:solidFill>
           <a:ln>
             <a:noFill/>
@@ -4276,7 +4276,7 @@
             <a:avLst/>
           </a:prstGeom>
           <a:solidFill>
-            <a:srgbClr val="246B53"/>
+            <a:srgbClr val="26C590"/>
           </a:solidFill>
           <a:ln>
             <a:noFill/>
@@ -4320,7 +4320,7 @@
             <a:r>
               <a:rPr sz="3000" b="1" i="0">
                 <a:solidFill>
-                  <a:srgbClr val="143D30"/>
+                  <a:srgbClr val="115F45"/>
                 </a:solidFill>
               </a:rPr>
               <a:t>초대합니다</a:t>
@@ -4345,11 +4345,11 @@
             </a:avLst>
           </a:prstGeom>
           <a:solidFill>
-            <a:srgbClr val="F0FAF6"/>
+            <a:srgbClr val="EEFCF7"/>
           </a:solidFill>
           <a:ln w="12700">
             <a:solidFill>
-              <a:srgbClr val="D0F1E6"/>
+              <a:srgbClr val="D1FAEC"/>
             </a:solidFill>
           </a:ln>
         </p:spPr>
@@ -4500,7 +4500,7 @@
             <a:avLst/>
           </a:prstGeom>
           <a:solidFill>
-            <a:srgbClr val="D0F1E6"/>
+            <a:srgbClr val="D1FAEC"/>
           </a:solidFill>
           <a:ln>
             <a:noFill/>
@@ -4529,7 +4529,7 @@
             <a:avLst/>
           </a:prstGeom>
           <a:solidFill>
-            <a:srgbClr val="246B53"/>
+            <a:srgbClr val="26C590"/>
           </a:solidFill>
           <a:ln>
             <a:noFill/>
@@ -4573,7 +4573,7 @@
             <a:r>
               <a:rPr sz="3000" b="1" i="0">
                 <a:solidFill>
-                  <a:srgbClr val="143D30"/>
+                  <a:srgbClr val="115F45"/>
                 </a:solidFill>
               </a:rPr>
               <a:t>부모의 한마디</a:t>
@@ -4598,11 +4598,11 @@
             </a:avLst>
           </a:prstGeom>
           <a:solidFill>
-            <a:srgbClr val="D0F1E6"/>
+            <a:srgbClr val="D1FAEC"/>
           </a:solidFill>
           <a:ln w="12700">
             <a:solidFill>
-              <a:srgbClr val="246B53"/>
+              <a:srgbClr val="26C590"/>
             </a:solidFill>
           </a:ln>
         </p:spPr>
@@ -4753,7 +4753,7 @@
             <a:avLst/>
           </a:prstGeom>
           <a:solidFill>
-            <a:srgbClr val="D0F1E6"/>
+            <a:srgbClr val="D1FAEC"/>
           </a:solidFill>
           <a:ln>
             <a:noFill/>
@@ -4782,7 +4782,7 @@
             <a:avLst/>
           </a:prstGeom>
           <a:solidFill>
-            <a:srgbClr val="246B53"/>
+            <a:srgbClr val="26C590"/>
           </a:solidFill>
           <a:ln>
             <a:noFill/>
@@ -4826,7 +4826,7 @@
             <a:r>
               <a:rPr sz="3000" b="1" i="0">
                 <a:solidFill>
-                  <a:srgbClr val="143D30"/>
+                  <a:srgbClr val="115F45"/>
                 </a:solidFill>
               </a:rPr>
               <a:t>사진 모음</a:t>
@@ -4851,11 +4851,11 @@
             </a:avLst>
           </a:prstGeom>
           <a:solidFill>
-            <a:srgbClr val="D0F1E6"/>
+            <a:srgbClr val="D1FAEC"/>
           </a:solidFill>
           <a:ln w="19050">
             <a:solidFill>
-              <a:srgbClr val="246B53"/>
+              <a:srgbClr val="26C590"/>
             </a:solidFill>
             <a:prstDash val="dash"/>
           </a:ln>
@@ -4874,7 +4874,7 @@
             <a:r>
               <a:rPr sz="1200" b="0" i="0">
                 <a:solidFill>
-                  <a:srgbClr val="143D30"/>
+                  <a:srgbClr val="115F45"/>
                 </a:solidFill>
               </a:rPr>
               <a:t>사진 1</a:t>
@@ -4899,11 +4899,11 @@
             </a:avLst>
           </a:prstGeom>
           <a:solidFill>
-            <a:srgbClr val="D0F1E6"/>
+            <a:srgbClr val="D1FAEC"/>
           </a:solidFill>
           <a:ln w="19050">
             <a:solidFill>
-              <a:srgbClr val="246B53"/>
+              <a:srgbClr val="26C590"/>
             </a:solidFill>
             <a:prstDash val="dash"/>
           </a:ln>
@@ -4922,7 +4922,7 @@
             <a:r>
               <a:rPr sz="1200" b="0" i="0">
                 <a:solidFill>
-                  <a:srgbClr val="143D30"/>
+                  <a:srgbClr val="115F45"/>
                 </a:solidFill>
               </a:rPr>
               <a:t>사진 2</a:t>
@@ -4947,11 +4947,11 @@
             </a:avLst>
           </a:prstGeom>
           <a:solidFill>
-            <a:srgbClr val="D0F1E6"/>
+            <a:srgbClr val="D1FAEC"/>
           </a:solidFill>
           <a:ln w="19050">
             <a:solidFill>
-              <a:srgbClr val="246B53"/>
+              <a:srgbClr val="26C590"/>
             </a:solidFill>
             <a:prstDash val="dash"/>
           </a:ln>
@@ -4970,7 +4970,7 @@
             <a:r>
               <a:rPr sz="1200" b="0" i="0">
                 <a:solidFill>
-                  <a:srgbClr val="143D30"/>
+                  <a:srgbClr val="115F45"/>
                 </a:solidFill>
               </a:rPr>
               <a:t>사진 3</a:t>
@@ -4995,11 +4995,11 @@
             </a:avLst>
           </a:prstGeom>
           <a:solidFill>
-            <a:srgbClr val="D0F1E6"/>
+            <a:srgbClr val="D1FAEC"/>
           </a:solidFill>
           <a:ln w="19050">
             <a:solidFill>
-              <a:srgbClr val="246B53"/>
+              <a:srgbClr val="26C590"/>
             </a:solidFill>
             <a:prstDash val="dash"/>
           </a:ln>
@@ -5018,7 +5018,7 @@
             <a:r>
               <a:rPr sz="1200" b="0" i="0">
                 <a:solidFill>
-                  <a:srgbClr val="143D30"/>
+                  <a:srgbClr val="115F45"/>
                 </a:solidFill>
               </a:rPr>
               <a:t>사진 4</a:t>
@@ -5043,11 +5043,11 @@
             </a:avLst>
           </a:prstGeom>
           <a:solidFill>
-            <a:srgbClr val="D0F1E6"/>
+            <a:srgbClr val="D1FAEC"/>
           </a:solidFill>
           <a:ln w="19050">
             <a:solidFill>
-              <a:srgbClr val="246B53"/>
+              <a:srgbClr val="26C590"/>
             </a:solidFill>
             <a:prstDash val="dash"/>
           </a:ln>
@@ -5066,7 +5066,7 @@
             <a:r>
               <a:rPr sz="1200" b="0" i="0">
                 <a:solidFill>
-                  <a:srgbClr val="143D30"/>
+                  <a:srgbClr val="115F45"/>
                 </a:solidFill>
               </a:rPr>
               <a:t>사진 5</a:t>
@@ -5091,11 +5091,11 @@
             </a:avLst>
           </a:prstGeom>
           <a:solidFill>
-            <a:srgbClr val="D0F1E6"/>
+            <a:srgbClr val="D1FAEC"/>
           </a:solidFill>
           <a:ln w="19050">
             <a:solidFill>
-              <a:srgbClr val="246B53"/>
+              <a:srgbClr val="26C590"/>
             </a:solidFill>
             <a:prstDash val="dash"/>
           </a:ln>
@@ -5114,7 +5114,7 @@
             <a:r>
               <a:rPr sz="1200" b="0" i="0">
                 <a:solidFill>
-                  <a:srgbClr val="143D30"/>
+                  <a:srgbClr val="115F45"/>
                 </a:solidFill>
               </a:rPr>
               <a:t>사진 6</a:t>
@@ -5139,11 +5139,11 @@
             </a:avLst>
           </a:prstGeom>
           <a:solidFill>
-            <a:srgbClr val="D0F1E6"/>
+            <a:srgbClr val="D1FAEC"/>
           </a:solidFill>
           <a:ln w="19050">
             <a:solidFill>
-              <a:srgbClr val="246B53"/>
+              <a:srgbClr val="26C590"/>
             </a:solidFill>
             <a:prstDash val="dash"/>
           </a:ln>
@@ -5162,7 +5162,7 @@
             <a:r>
               <a:rPr sz="1200" b="0" i="0">
                 <a:solidFill>
-                  <a:srgbClr val="143D30"/>
+                  <a:srgbClr val="115F45"/>
                 </a:solidFill>
               </a:rPr>
               <a:t>사진 7</a:t>
@@ -5187,11 +5187,11 @@
             </a:avLst>
           </a:prstGeom>
           <a:solidFill>
-            <a:srgbClr val="D0F1E6"/>
+            <a:srgbClr val="D1FAEC"/>
           </a:solidFill>
           <a:ln w="19050">
             <a:solidFill>
-              <a:srgbClr val="246B53"/>
+              <a:srgbClr val="26C590"/>
             </a:solidFill>
             <a:prstDash val="dash"/>
           </a:ln>
@@ -5210,7 +5210,7 @@
             <a:r>
               <a:rPr sz="1200" b="0" i="0">
                 <a:solidFill>
-                  <a:srgbClr val="143D30"/>
+                  <a:srgbClr val="115F45"/>
                 </a:solidFill>
               </a:rPr>
               <a:t>사진 8</a:t>
@@ -5290,7 +5290,7 @@
             <a:r>
               <a:rPr sz="3400" b="1" i="0">
                 <a:solidFill>
-                  <a:srgbClr val="143D30"/>
+                  <a:srgbClr val="115F45"/>
                 </a:solidFill>
               </a:rPr>
               <a:t>와 주셔서 고맙습니다</a:t>
@@ -5328,7 +5328,7 @@
             <a:r>
               <a:rPr sz="1700" b="0" i="1">
                 <a:solidFill>
-                  <a:srgbClr val="143D30"/>
+                  <a:srgbClr val="115F45"/>
                 </a:solidFill>
               </a:rPr>
               <a:t>아이가 한 살이 되었습니다</a:t>
@@ -5393,34 +5393,34 @@
         <a:sysClr val="window" lastClr="FFFFFF"/>
       </a:lt1>
       <a:dk2>
-        <a:srgbClr val="143D30"/>
+        <a:srgbClr val="115F45"/>
       </a:dk2>
       <a:lt2>
-        <a:srgbClr val="F0FAF6"/>
+        <a:srgbClr val="EEFCF7"/>
       </a:lt2>
       <a:accent1>
-        <a:srgbClr val="246B53"/>
+        <a:srgbClr val="26C590"/>
       </a:accent1>
       <a:accent2>
-        <a:srgbClr val="913B83"/>
+        <a:srgbClr val="209DB6"/>
       </a:accent2>
       <a:accent3>
-        <a:srgbClr val="143D30"/>
+        <a:srgbClr val="115F45"/>
       </a:accent3>
       <a:accent4>
-        <a:srgbClr val="D0F1E6"/>
+        <a:srgbClr val="D1FAEC"/>
       </a:accent4>
       <a:accent5>
-        <a:srgbClr val="5A536B"/>
+        <a:srgbClr val="23B1A3"/>
       </a:accent5>
       <a:accent6>
-        <a:srgbClr val="728B83"/>
+        <a:srgbClr val="709F8F"/>
       </a:accent6>
       <a:hlink>
-        <a:srgbClr val="246B53"/>
+        <a:srgbClr val="26C590"/>
       </a:hlink>
       <a:folHlink>
-        <a:srgbClr val="143D30"/>
+        <a:srgbClr val="115F45"/>
       </a:folHlink>
     </a:clrScheme>
     <a:fontScheme name="Office">

--- a/public/fun/pack/pptx/birthday/돌잔치_19_감사인사중심_반딧불마을.pptx
+++ b/public/fun/pack/pptx/birthday/돌잔치_19_감사인사중심_반딧불마을.pptx
@@ -3286,6 +3286,14 @@
 <file path=ppt/slides/slide1.xml><?xml version="1.0" encoding="utf-8"?>
 <p:sld xmlns:a="http://schemas.openxmlformats.org/drawingml/2006/main" xmlns:p="http://schemas.openxmlformats.org/presentationml/2006/main" xmlns:r="http://schemas.openxmlformats.org/officeDocument/2006/relationships">
   <p:cSld>
+    <p:bg>
+      <p:bgPr>
+        <a:solidFill>
+          <a:srgbClr val="EAFDF7"/>
+        </a:solidFill>
+        <a:effectLst/>
+      </p:bgPr>
+    </p:bg>
     <p:spTree>
       <p:nvGrpSpPr>
         <p:cNvPr id="1" name=""/>
@@ -3293,30 +3301,116 @@
         <p:nvPr/>
       </p:nvGrpSpPr>
       <p:grpSpPr/>
-      <p:pic>
-        <p:nvPicPr>
-          <p:cNvPr id="3" name="표지 그림" descr="birthday-19.jpg"/>
-          <p:cNvPicPr>
-            <a:picLocks noChangeAspect="1"/>
-          </p:cNvPicPr>
+      <p:sp>
+        <p:nvSpPr>
+          <p:cNvPr id="3" name="사진 자리"/>
+          <p:cNvSpPr/>
           <p:nvPr/>
-        </p:nvPicPr>
-        <p:blipFill>
-          <a:blip r:embed="rId2"/>
-          <a:stretch>
-            <a:fillRect/>
-          </a:stretch>
-        </p:blipFill>
-        <p:spPr>
-          <a:xfrm>
-            <a:off x="0" y="0"/>
-            <a:ext cx="12191695" cy="6858000"/>
+        </p:nvSpPr>
+        <p:spPr>
+          <a:xfrm>
+            <a:off x="7802684" y="0"/>
+            <a:ext cx="4389010" cy="6858000"/>
           </a:xfrm>
           <a:prstGeom prst="rect">
             <a:avLst/>
           </a:prstGeom>
-        </p:spPr>
-      </p:pic>
+          <a:solidFill>
+            <a:srgbClr val="A5F3D9"/>
+          </a:solidFill>
+          <a:ln>
+            <a:noFill/>
+          </a:ln>
+        </p:spPr>
+        <p:txBody>
+          <a:bodyPr rtlCol="0" anchor="ctr" wrap="square" lIns="54864" rIns="54864" tIns="27432" bIns="27432">
+            <a:noAutofit/>
+          </a:bodyPr>
+          <a:lstStyle/>
+          <a:p>
+            <a:pPr algn="ctr">
+              <a:lnSpc>
+                <a:spcPct val="100000"/>
+              </a:lnSpc>
+            </a:pPr>
+            <a:r>
+              <a:rPr sz="1400" b="0" i="0">
+                <a:solidFill>
+                  <a:srgbClr val="27493E"/>
+                </a:solidFill>
+              </a:rPr>
+              <a:t>사진을 넣어 주세요</a:t>
+            </a:r>
+          </a:p>
+        </p:txBody>
+      </p:sp>
+      <p:sp>
+        <p:nvSpPr>
+          <p:cNvPr id="4" name="장식"/>
+          <p:cNvSpPr/>
+          <p:nvPr/>
+        </p:nvSpPr>
+        <p:spPr>
+          <a:xfrm>
+            <a:off x="8168435" y="365760"/>
+            <a:ext cx="3657508" cy="6126480"/>
+          </a:xfrm>
+          <a:prstGeom prst="rect">
+            <a:avLst/>
+          </a:prstGeom>
+          <a:noFill/>
+          <a:ln w="9525">
+            <a:solidFill>
+              <a:srgbClr val="26231F"/>
+            </a:solidFill>
+          </a:ln>
+        </p:spPr>
+        <p:txBody>
+          <a:bodyPr rtlCol="0" anchor="ctr"/>
+          <a:lstStyle/>
+          <a:p>
+            <a:pPr algn="ctr"/>
+          </a:p>
+        </p:txBody>
+      </p:sp>
+      <p:sp>
+        <p:nvSpPr>
+          <p:cNvPr id="5" name="라벨"/>
+          <p:cNvSpPr txBox="1"/>
+          <p:nvPr/>
+        </p:nvSpPr>
+        <p:spPr>
+          <a:xfrm>
+            <a:off x="822960" y="2148840"/>
+            <a:ext cx="5608179" cy="274320"/>
+          </a:xfrm>
+          <a:prstGeom prst="rect">
+            <a:avLst/>
+          </a:prstGeom>
+          <a:noFill/>
+        </p:spPr>
+        <p:txBody>
+          <a:bodyPr wrap="square" lIns="54864" rIns="54864" tIns="27432" bIns="27432" anchor="t">
+            <a:noAutofit/>
+          </a:bodyPr>
+          <a:lstStyle/>
+          <a:p>
+            <a:pPr algn="l">
+              <a:lnSpc>
+                <a:spcPct val="115000"/>
+              </a:lnSpc>
+            </a:pPr>
+            <a:r>
+              <a:rPr sz="1000" b="1" i="0" spc="250">
+                <a:solidFill>
+                  <a:srgbClr val="26231F"/>
+                </a:solidFill>
+              </a:rPr>
+              <a:t>FIRST BIRTHDAY</a:t>
+            </a:r>
+          </a:p>
+        </p:txBody>
+      </p:sp>
       <p:sp>
         <p:nvSpPr>
           <p:cNvPr id="2" name="Title 1"/>
@@ -3329,8 +3423,8 @@
         </p:nvSpPr>
         <p:spPr>
           <a:xfrm>
-            <a:off x="853418" y="2057400"/>
-            <a:ext cx="6095847" cy="1554480"/>
+            <a:off x="822960" y="2606040"/>
+            <a:ext cx="5608179" cy="1188720"/>
           </a:xfrm>
         </p:spPr>
         <p:txBody>
@@ -3347,7 +3441,7 @@
             <a:r>
               <a:rPr sz="4000" b="1" i="0">
                 <a:solidFill>
-                  <a:srgbClr val="115F45"/>
+                  <a:srgbClr val="26231F"/>
                 </a:solidFill>
               </a:rPr>
               <a:t>첫 번째 생일</a:t>
@@ -3357,14 +3451,14 @@
       </p:sp>
       <p:sp>
         <p:nvSpPr>
-          <p:cNvPr id="4" name="한 줄 문구"/>
+          <p:cNvPr id="6" name="한 줄 문구"/>
           <p:cNvSpPr txBox="1"/>
           <p:nvPr/>
         </p:nvSpPr>
         <p:spPr>
           <a:xfrm>
-            <a:off x="853418" y="3749039"/>
-            <a:ext cx="6095847" cy="822960"/>
+            <a:off x="822960" y="3886200"/>
+            <a:ext cx="5608179" cy="822960"/>
           </a:xfrm>
           <a:prstGeom prst="rect">
             <a:avLst/>
@@ -3383,9 +3477,9 @@
               </a:lnSpc>
             </a:pPr>
             <a:r>
-              <a:rPr sz="1700" b="0" i="1">
+              <a:rPr sz="1700" b="0" i="0">
                 <a:solidFill>
-                  <a:srgbClr val="115F45"/>
+                  <a:srgbClr val="26231F"/>
                 </a:solidFill>
               </a:rPr>
               <a:t>바쁘신 중에도 와 주셔서 고맙습니다</a:t>
@@ -3395,14 +3489,14 @@
       </p:sp>
       <p:sp>
         <p:nvSpPr>
-          <p:cNvPr id="5" name="안내 문구"/>
+          <p:cNvPr id="7" name="안내 문구"/>
           <p:cNvSpPr txBox="1"/>
           <p:nvPr/>
         </p:nvSpPr>
         <p:spPr>
           <a:xfrm>
-            <a:off x="853418" y="4617720"/>
-            <a:ext cx="6095847" cy="914400"/>
+            <a:off x="822960" y="4754880"/>
+            <a:ext cx="5608179" cy="914400"/>
           </a:xfrm>
           <a:prstGeom prst="rect">
             <a:avLst/>
@@ -3423,10 +3517,10 @@
             <a:r>
               <a:rPr sz="1400" b="0" i="0">
                 <a:solidFill>
-                  <a:srgbClr val="666666"/>
+                  <a:srgbClr val="26231F"/>
                 </a:solidFill>
               </a:rPr>
-              <a:t>아기 이름 · 2027. 00. 00</a:t>
+              <a:t>아기 이름 · 날짜 입력</a:t>
             </a:r>
           </a:p>
           <a:p>
@@ -3438,7 +3532,7 @@
             <a:r>
               <a:rPr sz="1400" b="0" i="0">
                 <a:solidFill>
-                  <a:srgbClr val="666666"/>
+                  <a:srgbClr val="26231F"/>
                 </a:solidFill>
               </a:rPr>
               <a:t>장소를 입력하세요</a:t>
@@ -3460,7 +3554,7 @@
     <p:bg>
       <p:bgPr>
         <a:solidFill>
-          <a:srgbClr val="FFFFFF"/>
+          <a:srgbClr val="EAFDF7"/>
         </a:solidFill>
         <a:effectLst/>
       </p:bgPr>
@@ -3480,14 +3574,14 @@
         </p:nvSpPr>
         <p:spPr>
           <a:xfrm>
-            <a:off x="9905695" y="-1463040"/>
-            <a:ext cx="3840480" cy="3840480"/>
-          </a:xfrm>
-          <a:prstGeom prst="ellipse">
+            <a:off x="640080" y="6400800"/>
+            <a:ext cx="10911535" cy="10972"/>
+          </a:xfrm>
+          <a:prstGeom prst="rect">
             <a:avLst/>
           </a:prstGeom>
           <a:solidFill>
-            <a:srgbClr val="D1FAEC"/>
+            <a:srgbClr val="26231F"/>
           </a:solidFill>
           <a:ln>
             <a:noFill/>
@@ -3503,20 +3597,58 @@
       </p:sp>
       <p:sp>
         <p:nvSpPr>
-          <p:cNvPr id="4" name="장식"/>
+          <p:cNvPr id="4" name="하단 라벨"/>
+          <p:cNvSpPr txBox="1"/>
+          <p:nvPr/>
+        </p:nvSpPr>
+        <p:spPr>
+          <a:xfrm>
+            <a:off x="640080" y="6437376"/>
+            <a:ext cx="5486400" cy="274320"/>
+          </a:xfrm>
+          <a:prstGeom prst="rect">
+            <a:avLst/>
+          </a:prstGeom>
+          <a:noFill/>
+        </p:spPr>
+        <p:txBody>
+          <a:bodyPr wrap="square" lIns="54864" rIns="54864" tIns="27432" bIns="27432" anchor="ctr">
+            <a:noAutofit/>
+          </a:bodyPr>
+          <a:lstStyle/>
+          <a:p>
+            <a:pPr algn="l">
+              <a:lnSpc>
+                <a:spcPct val="115000"/>
+              </a:lnSpc>
+            </a:pPr>
+            <a:r>
+              <a:rPr sz="900" b="1" i="0" spc="250">
+                <a:solidFill>
+                  <a:srgbClr val="26231F"/>
+                </a:solidFill>
+              </a:rPr>
+              <a:t>FIRST BIRTHDAY</a:t>
+            </a:r>
+          </a:p>
+        </p:txBody>
+      </p:sp>
+      <p:sp>
+        <p:nvSpPr>
+          <p:cNvPr id="5" name="포인트"/>
           <p:cNvSpPr/>
           <p:nvPr/>
         </p:nvSpPr>
         <p:spPr>
           <a:xfrm>
-            <a:off x="11094415" y="274320"/>
-            <a:ext cx="411480" cy="411480"/>
-          </a:xfrm>
-          <a:prstGeom prst="ellipse">
+            <a:off x="11213287" y="6473952"/>
+            <a:ext cx="219456" cy="219456"/>
+          </a:xfrm>
+          <a:prstGeom prst="sun">
             <a:avLst/>
           </a:prstGeom>
           <a:solidFill>
-            <a:srgbClr val="26C590"/>
+            <a:srgbClr val="7BEAC5"/>
           </a:solidFill>
           <a:ln>
             <a:noFill/>
@@ -3542,8 +3674,8 @@
         </p:nvSpPr>
         <p:spPr>
           <a:xfrm>
-            <a:off x="640080" y="457200"/>
-            <a:ext cx="9722815" cy="868680"/>
+            <a:off x="640080" y="502920"/>
+            <a:ext cx="10911535" cy="914400"/>
           </a:xfrm>
         </p:spPr>
         <p:txBody>
@@ -3560,7 +3692,7 @@
             <a:r>
               <a:rPr sz="3000" b="1" i="0">
                 <a:solidFill>
-                  <a:srgbClr val="115F45"/>
+                  <a:srgbClr val="26231F"/>
                 </a:solidFill>
               </a:rPr>
               <a:t>우리 아기를 소개합니다</a:t>
@@ -3570,14 +3702,14 @@
       </p:sp>
       <p:sp>
         <p:nvSpPr>
-          <p:cNvPr id="5" name="사진 자리"/>
+          <p:cNvPr id="6" name="사진 자리"/>
           <p:cNvSpPr/>
           <p:nvPr/>
         </p:nvSpPr>
         <p:spPr>
           <a:xfrm>
             <a:off x="640080" y="1600200"/>
-            <a:ext cx="3840480" cy="4617720"/>
+            <a:ext cx="3840480" cy="4389120"/>
           </a:xfrm>
           <a:prstGeom prst="roundRect">
             <a:avLst>
@@ -3588,9 +3720,7 @@
             <a:srgbClr val="D1FAEC"/>
           </a:solidFill>
           <a:ln w="19050">
-            <a:solidFill>
-              <a:srgbClr val="26C590"/>
-            </a:solidFill>
+            <a:noFill/>
             <a:prstDash val="dash"/>
           </a:ln>
         </p:spPr>
@@ -3608,7 +3738,7 @@
             <a:r>
               <a:rPr sz="1400" b="0" i="0">
                 <a:solidFill>
-                  <a:srgbClr val="115F45"/>
+                  <a:srgbClr val="8E8780"/>
                 </a:solidFill>
               </a:rPr>
               <a:t>아기 사진을 넣어 주세요</a:t>
@@ -3618,7 +3748,7 @@
       </p:sp>
       <p:graphicFrame>
         <p:nvGraphicFramePr>
-          <p:cNvPr id="6" name="표"/>
+          <p:cNvPr id="7" name="표"/>
           <p:cNvGraphicFramePr>
             <a:graphicFrameLocks noGrp="1"/>
           </p:cNvGraphicFramePr>
@@ -3648,7 +3778,7 @@
                       <a:r>
                         <a:rPr sz="1500" b="1">
                           <a:solidFill>
-                            <a:srgbClr val="115F45"/>
+                            <a:srgbClr val="27493E"/>
                           </a:solidFill>
                         </a:rPr>
                         <a:t>이름</a:t>
@@ -3694,7 +3824,7 @@
                       <a:r>
                         <a:rPr sz="1500" b="0">
                           <a:solidFill>
-                            <a:srgbClr val="2B2B2B"/>
+                            <a:srgbClr val="26231F"/>
                           </a:solidFill>
                         </a:rPr>
                         <a:t>입력하세요</a:t>
@@ -3727,7 +3857,7 @@
                       <a:prstDash val="solid"/>
                     </a:lnB>
                     <a:solidFill>
-                      <a:srgbClr val="EEFCF7"/>
+                      <a:srgbClr val="EAFDF7"/>
                     </a:solidFill>
                   </a:tcPr>
                 </a:tc>
@@ -3742,7 +3872,7 @@
                       <a:r>
                         <a:rPr sz="1500" b="1">
                           <a:solidFill>
-                            <a:srgbClr val="115F45"/>
+                            <a:srgbClr val="27493E"/>
                           </a:solidFill>
                         </a:rPr>
                         <a:t>생일</a:t>
@@ -3788,7 +3918,7 @@
                       <a:r>
                         <a:rPr sz="1500" b="0">
                           <a:solidFill>
-                            <a:srgbClr val="2B2B2B"/>
+                            <a:srgbClr val="26231F"/>
                           </a:solidFill>
                         </a:rPr>
                         <a:t>입력하세요</a:t>
@@ -3836,7 +3966,7 @@
                       <a:r>
                         <a:rPr sz="1500" b="1">
                           <a:solidFill>
-                            <a:srgbClr val="115F45"/>
+                            <a:srgbClr val="27493E"/>
                           </a:solidFill>
                         </a:rPr>
                         <a:t>키 · 몸무게</a:t>
@@ -3882,7 +4012,7 @@
                       <a:r>
                         <a:rPr sz="1500" b="0">
                           <a:solidFill>
-                            <a:srgbClr val="2B2B2B"/>
+                            <a:srgbClr val="26231F"/>
                           </a:solidFill>
                         </a:rPr>
                         <a:t>입력하세요</a:t>
@@ -3915,7 +4045,7 @@
                       <a:prstDash val="solid"/>
                     </a:lnB>
                     <a:solidFill>
-                      <a:srgbClr val="EEFCF7"/>
+                      <a:srgbClr val="EAFDF7"/>
                     </a:solidFill>
                   </a:tcPr>
                 </a:tc>
@@ -3930,7 +4060,7 @@
                       <a:r>
                         <a:rPr sz="1500" b="1">
                           <a:solidFill>
-                            <a:srgbClr val="115F45"/>
+                            <a:srgbClr val="27493E"/>
                           </a:solidFill>
                         </a:rPr>
                         <a:t>좋아하는 것</a:t>
@@ -3976,7 +4106,7 @@
                       <a:r>
                         <a:rPr sz="1500" b="0">
                           <a:solidFill>
-                            <a:srgbClr val="2B2B2B"/>
+                            <a:srgbClr val="26231F"/>
                           </a:solidFill>
                         </a:rPr>
                         <a:t>입력하세요</a:t>
@@ -4024,7 +4154,7 @@
                       <a:r>
                         <a:rPr sz="1500" b="1">
                           <a:solidFill>
-                            <a:srgbClr val="115F45"/>
+                            <a:srgbClr val="27493E"/>
                           </a:solidFill>
                         </a:rPr>
                         <a:t>별명</a:t>
@@ -4070,7 +4200,7 @@
                       <a:r>
                         <a:rPr sz="1500" b="0">
                           <a:solidFill>
-                            <a:srgbClr val="2B2B2B"/>
+                            <a:srgbClr val="26231F"/>
                           </a:solidFill>
                         </a:rPr>
                         <a:t>입력하세요</a:t>
@@ -4103,7 +4233,7 @@
                       <a:prstDash val="solid"/>
                     </a:lnB>
                     <a:solidFill>
-                      <a:srgbClr val="EEFCF7"/>
+                      <a:srgbClr val="EAFDF7"/>
                     </a:solidFill>
                   </a:tcPr>
                 </a:tc>
@@ -4118,7 +4248,7 @@
                       <a:r>
                         <a:rPr sz="1500" b="1">
                           <a:solidFill>
-                            <a:srgbClr val="115F45"/>
+                            <a:srgbClr val="27493E"/>
                           </a:solidFill>
                         </a:rPr>
                         <a:t>부모의 마음</a:t>
@@ -4164,7 +4294,7 @@
                       <a:r>
                         <a:rPr sz="1500" b="0">
                           <a:solidFill>
-                            <a:srgbClr val="2B2B2B"/>
+                            <a:srgbClr val="26231F"/>
                           </a:solidFill>
                         </a:rPr>
                         <a:t>입력하세요</a:t>
@@ -4220,7 +4350,7 @@
     <p:bg>
       <p:bgPr>
         <a:solidFill>
-          <a:srgbClr val="FFFFFF"/>
+          <a:srgbClr val="EAFDF7"/>
         </a:solidFill>
         <a:effectLst/>
       </p:bgPr>
@@ -4240,14 +4370,14 @@
         </p:nvSpPr>
         <p:spPr>
           <a:xfrm>
-            <a:off x="9905695" y="-1463040"/>
-            <a:ext cx="3840480" cy="3840480"/>
-          </a:xfrm>
-          <a:prstGeom prst="ellipse">
+            <a:off x="640080" y="6400800"/>
+            <a:ext cx="10911535" cy="10972"/>
+          </a:xfrm>
+          <a:prstGeom prst="rect">
             <a:avLst/>
           </a:prstGeom>
           <a:solidFill>
-            <a:srgbClr val="D1FAEC"/>
+            <a:srgbClr val="26231F"/>
           </a:solidFill>
           <a:ln>
             <a:noFill/>
@@ -4263,20 +4393,58 @@
       </p:sp>
       <p:sp>
         <p:nvSpPr>
-          <p:cNvPr id="4" name="장식"/>
+          <p:cNvPr id="4" name="하단 라벨"/>
+          <p:cNvSpPr txBox="1"/>
+          <p:nvPr/>
+        </p:nvSpPr>
+        <p:spPr>
+          <a:xfrm>
+            <a:off x="640080" y="6437376"/>
+            <a:ext cx="5486400" cy="274320"/>
+          </a:xfrm>
+          <a:prstGeom prst="rect">
+            <a:avLst/>
+          </a:prstGeom>
+          <a:noFill/>
+        </p:spPr>
+        <p:txBody>
+          <a:bodyPr wrap="square" lIns="54864" rIns="54864" tIns="27432" bIns="27432" anchor="ctr">
+            <a:noAutofit/>
+          </a:bodyPr>
+          <a:lstStyle/>
+          <a:p>
+            <a:pPr algn="l">
+              <a:lnSpc>
+                <a:spcPct val="115000"/>
+              </a:lnSpc>
+            </a:pPr>
+            <a:r>
+              <a:rPr sz="900" b="1" i="0" spc="250">
+                <a:solidFill>
+                  <a:srgbClr val="26231F"/>
+                </a:solidFill>
+              </a:rPr>
+              <a:t>FIRST BIRTHDAY</a:t>
+            </a:r>
+          </a:p>
+        </p:txBody>
+      </p:sp>
+      <p:sp>
+        <p:nvSpPr>
+          <p:cNvPr id="5" name="포인트"/>
           <p:cNvSpPr/>
           <p:nvPr/>
         </p:nvSpPr>
         <p:spPr>
           <a:xfrm>
-            <a:off x="11094415" y="274320"/>
-            <a:ext cx="411480" cy="411480"/>
-          </a:xfrm>
-          <a:prstGeom prst="ellipse">
+            <a:off x="11213287" y="6473952"/>
+            <a:ext cx="219456" cy="219456"/>
+          </a:xfrm>
+          <a:prstGeom prst="sun">
             <a:avLst/>
           </a:prstGeom>
           <a:solidFill>
-            <a:srgbClr val="26C590"/>
+            <a:srgbClr val="7BEAC5"/>
           </a:solidFill>
           <a:ln>
             <a:noFill/>
@@ -4302,8 +4470,8 @@
         </p:nvSpPr>
         <p:spPr>
           <a:xfrm>
-            <a:off x="640080" y="457200"/>
-            <a:ext cx="9722815" cy="868680"/>
+            <a:off x="640080" y="502920"/>
+            <a:ext cx="10911535" cy="914400"/>
           </a:xfrm>
         </p:spPr>
         <p:txBody>
@@ -4320,7 +4488,7 @@
             <a:r>
               <a:rPr sz="3000" b="1" i="0">
                 <a:solidFill>
-                  <a:srgbClr val="115F45"/>
+                  <a:srgbClr val="26231F"/>
                 </a:solidFill>
               </a:rPr>
               <a:t>초대합니다</a:t>
@@ -4330,24 +4498,24 @@
       </p:sp>
       <p:sp>
         <p:nvSpPr>
-          <p:cNvPr id="5" name="초대 글 칸"/>
+          <p:cNvPr id="6" name="초대 글 칸"/>
           <p:cNvSpPr/>
           <p:nvPr/>
         </p:nvSpPr>
         <p:spPr>
           <a:xfrm>
             <a:off x="640080" y="1600200"/>
-            <a:ext cx="10911535" cy="4800600"/>
+            <a:ext cx="10911535" cy="4572000"/>
           </a:xfrm>
           <a:prstGeom prst="roundRect">
             <a:avLst>
-              <a:gd name="adj" fmla="val 8000"/>
+              <a:gd name="adj" fmla="val 3000"/>
             </a:avLst>
           </a:prstGeom>
           <a:solidFill>
-            <a:srgbClr val="EEFCF7"/>
+            <a:srgbClr val="FFFFFF"/>
           </a:solidFill>
-          <a:ln w="12700">
+          <a:ln w="9525">
             <a:solidFill>
               <a:srgbClr val="D1FAEC"/>
             </a:solidFill>
@@ -4363,14 +4531,43 @@
       </p:sp>
       <p:sp>
         <p:nvSpPr>
-          <p:cNvPr id="6" name="초대 글"/>
+          <p:cNvPr id="7" name="위쪽 띠"/>
+          <p:cNvSpPr/>
+          <p:nvPr/>
+        </p:nvSpPr>
+        <p:spPr>
+          <a:xfrm>
+            <a:off x="649224" y="1609344"/>
+            <a:ext cx="10893247" cy="82296"/>
+          </a:xfrm>
+          <a:prstGeom prst="rect">
+            <a:avLst/>
+          </a:prstGeom>
+          <a:solidFill>
+            <a:srgbClr val="7BEAC5"/>
+          </a:solidFill>
+          <a:ln>
+            <a:noFill/>
+          </a:ln>
+        </p:spPr>
+        <p:txBody>
+          <a:bodyPr rtlCol="0" anchor="ctr"/>
+          <a:lstStyle/>
+          <a:p>
+            <a:pPr algn="ctr"/>
+          </a:p>
+        </p:txBody>
+      </p:sp>
+      <p:sp>
+        <p:nvSpPr>
+          <p:cNvPr id="8" name="초대 글"/>
           <p:cNvSpPr txBox="1"/>
           <p:nvPr/>
         </p:nvSpPr>
         <p:spPr>
           <a:xfrm>
             <a:off x="1097280" y="1965960"/>
-            <a:ext cx="9997135" cy="4069080"/>
+            <a:ext cx="9997135" cy="3840480"/>
           </a:xfrm>
           <a:prstGeom prst="rect">
             <a:avLst/>
@@ -4391,7 +4588,7 @@
             <a:r>
               <a:rPr sz="2000" b="0" i="0">
                 <a:solidFill>
-                  <a:srgbClr val="2B2B2B"/>
+                  <a:srgbClr val="26231F"/>
                 </a:solidFill>
               </a:rPr>
               <a:t>저희 아이의 첫 생일에 모십니다.</a:t>
@@ -4406,7 +4603,7 @@
             <a:r>
               <a:rPr sz="2000" b="0" i="0">
                 <a:solidFill>
-                  <a:srgbClr val="2B2B2B"/>
+                  <a:srgbClr val="26231F"/>
                 </a:solidFill>
               </a:rPr>
               <a:t/>
@@ -4421,7 +4618,7 @@
             <a:r>
               <a:rPr sz="2000" b="0" i="0">
                 <a:solidFill>
-                  <a:srgbClr val="2B2B2B"/>
+                  <a:srgbClr val="26231F"/>
                 </a:solidFill>
               </a:rPr>
               <a:t>오셔서 같이 밥 한 끼 해 주세요.</a:t>
@@ -4436,7 +4633,7 @@
             <a:r>
               <a:rPr sz="2000" b="0" i="0">
                 <a:solidFill>
-                  <a:srgbClr val="2B2B2B"/>
+                  <a:srgbClr val="26231F"/>
                 </a:solidFill>
               </a:rPr>
               <a:t/>
@@ -4451,7 +4648,7 @@
             <a:r>
               <a:rPr sz="2000" b="0" i="0">
                 <a:solidFill>
-                  <a:srgbClr val="2B2B2B"/>
+                  <a:srgbClr val="26231F"/>
                 </a:solidFill>
               </a:rPr>
               <a:t>일시 · 장소를 입력하세요</a:t>
@@ -4473,7 +4670,7 @@
     <p:bg>
       <p:bgPr>
         <a:solidFill>
-          <a:srgbClr val="FFFFFF"/>
+          <a:srgbClr val="EAFDF7"/>
         </a:solidFill>
         <a:effectLst/>
       </p:bgPr>
@@ -4493,14 +4690,14 @@
         </p:nvSpPr>
         <p:spPr>
           <a:xfrm>
-            <a:off x="9905695" y="-1463040"/>
-            <a:ext cx="3840480" cy="3840480"/>
-          </a:xfrm>
-          <a:prstGeom prst="ellipse">
+            <a:off x="640080" y="6400800"/>
+            <a:ext cx="10911535" cy="10972"/>
+          </a:xfrm>
+          <a:prstGeom prst="rect">
             <a:avLst/>
           </a:prstGeom>
           <a:solidFill>
-            <a:srgbClr val="D1FAEC"/>
+            <a:srgbClr val="26231F"/>
           </a:solidFill>
           <a:ln>
             <a:noFill/>
@@ -4516,20 +4713,58 @@
       </p:sp>
       <p:sp>
         <p:nvSpPr>
-          <p:cNvPr id="4" name="장식"/>
+          <p:cNvPr id="4" name="하단 라벨"/>
+          <p:cNvSpPr txBox="1"/>
+          <p:nvPr/>
+        </p:nvSpPr>
+        <p:spPr>
+          <a:xfrm>
+            <a:off x="640080" y="6437376"/>
+            <a:ext cx="5486400" cy="274320"/>
+          </a:xfrm>
+          <a:prstGeom prst="rect">
+            <a:avLst/>
+          </a:prstGeom>
+          <a:noFill/>
+        </p:spPr>
+        <p:txBody>
+          <a:bodyPr wrap="square" lIns="54864" rIns="54864" tIns="27432" bIns="27432" anchor="ctr">
+            <a:noAutofit/>
+          </a:bodyPr>
+          <a:lstStyle/>
+          <a:p>
+            <a:pPr algn="l">
+              <a:lnSpc>
+                <a:spcPct val="115000"/>
+              </a:lnSpc>
+            </a:pPr>
+            <a:r>
+              <a:rPr sz="900" b="1" i="0" spc="250">
+                <a:solidFill>
+                  <a:srgbClr val="26231F"/>
+                </a:solidFill>
+              </a:rPr>
+              <a:t>FIRST BIRTHDAY</a:t>
+            </a:r>
+          </a:p>
+        </p:txBody>
+      </p:sp>
+      <p:sp>
+        <p:nvSpPr>
+          <p:cNvPr id="5" name="포인트"/>
           <p:cNvSpPr/>
           <p:nvPr/>
         </p:nvSpPr>
         <p:spPr>
           <a:xfrm>
-            <a:off x="11094415" y="274320"/>
-            <a:ext cx="411480" cy="411480"/>
-          </a:xfrm>
-          <a:prstGeom prst="ellipse">
+            <a:off x="11213287" y="6473952"/>
+            <a:ext cx="219456" cy="219456"/>
+          </a:xfrm>
+          <a:prstGeom prst="sun">
             <a:avLst/>
           </a:prstGeom>
           <a:solidFill>
-            <a:srgbClr val="26C590"/>
+            <a:srgbClr val="7BEAC5"/>
           </a:solidFill>
           <a:ln>
             <a:noFill/>
@@ -4555,8 +4790,8 @@
         </p:nvSpPr>
         <p:spPr>
           <a:xfrm>
-            <a:off x="640080" y="457200"/>
-            <a:ext cx="9722815" cy="868680"/>
+            <a:off x="640080" y="502920"/>
+            <a:ext cx="10911535" cy="914400"/>
           </a:xfrm>
         </p:spPr>
         <p:txBody>
@@ -4573,7 +4808,7 @@
             <a:r>
               <a:rPr sz="3000" b="1" i="0">
                 <a:solidFill>
-                  <a:srgbClr val="115F45"/>
+                  <a:srgbClr val="26231F"/>
                 </a:solidFill>
               </a:rPr>
               <a:t>부모의 한마디</a:t>
@@ -4583,26 +4818,26 @@
       </p:sp>
       <p:sp>
         <p:nvSpPr>
-          <p:cNvPr id="5" name="편지 칸"/>
+          <p:cNvPr id="6" name="편지 칸"/>
           <p:cNvSpPr/>
           <p:nvPr/>
         </p:nvSpPr>
         <p:spPr>
           <a:xfrm>
             <a:off x="640080" y="1600200"/>
-            <a:ext cx="10911535" cy="4800600"/>
+            <a:ext cx="10911535" cy="4572000"/>
           </a:xfrm>
           <a:prstGeom prst="roundRect">
             <a:avLst>
-              <a:gd name="adj" fmla="val 8000"/>
+              <a:gd name="adj" fmla="val 3000"/>
             </a:avLst>
           </a:prstGeom>
           <a:solidFill>
-            <a:srgbClr val="D1FAEC"/>
+            <a:srgbClr val="FFFFFF"/>
           </a:solidFill>
-          <a:ln w="12700">
+          <a:ln w="9525">
             <a:solidFill>
-              <a:srgbClr val="26C590"/>
+              <a:srgbClr val="D1FAEC"/>
             </a:solidFill>
           </a:ln>
         </p:spPr>
@@ -4616,14 +4851,43 @@
       </p:sp>
       <p:sp>
         <p:nvSpPr>
-          <p:cNvPr id="6" name="편지 글"/>
+          <p:cNvPr id="7" name="위쪽 띠"/>
+          <p:cNvSpPr/>
+          <p:nvPr/>
+        </p:nvSpPr>
+        <p:spPr>
+          <a:xfrm>
+            <a:off x="649224" y="1609344"/>
+            <a:ext cx="10893247" cy="82296"/>
+          </a:xfrm>
+          <a:prstGeom prst="rect">
+            <a:avLst/>
+          </a:prstGeom>
+          <a:solidFill>
+            <a:srgbClr val="7BEAC5"/>
+          </a:solidFill>
+          <a:ln>
+            <a:noFill/>
+          </a:ln>
+        </p:spPr>
+        <p:txBody>
+          <a:bodyPr rtlCol="0" anchor="ctr"/>
+          <a:lstStyle/>
+          <a:p>
+            <a:pPr algn="ctr"/>
+          </a:p>
+        </p:txBody>
+      </p:sp>
+      <p:sp>
+        <p:nvSpPr>
+          <p:cNvPr id="8" name="편지 글"/>
           <p:cNvSpPr txBox="1"/>
           <p:nvPr/>
         </p:nvSpPr>
         <p:spPr>
           <a:xfrm>
             <a:off x="1097280" y="1965960"/>
-            <a:ext cx="9997135" cy="4069080"/>
+            <a:ext cx="9997135" cy="3840480"/>
           </a:xfrm>
           <a:prstGeom prst="rect">
             <a:avLst/>
@@ -4644,7 +4908,7 @@
             <a:r>
               <a:rPr sz="2000" b="0" i="0">
                 <a:solidFill>
-                  <a:srgbClr val="2B2B2B"/>
+                  <a:srgbClr val="26231F"/>
                 </a:solidFill>
               </a:rPr>
               <a:t>사랑하는 우리 아기에게</a:t>
@@ -4659,7 +4923,7 @@
             <a:r>
               <a:rPr sz="2000" b="0" i="0">
                 <a:solidFill>
-                  <a:srgbClr val="2B2B2B"/>
+                  <a:srgbClr val="26231F"/>
                 </a:solidFill>
               </a:rPr>
               <a:t/>
@@ -4674,7 +4938,7 @@
             <a:r>
               <a:rPr sz="2000" b="0" i="0">
                 <a:solidFill>
-                  <a:srgbClr val="2B2B2B"/>
+                  <a:srgbClr val="26231F"/>
                 </a:solidFill>
               </a:rPr>
               <a:t>엄마 아빠의 마음을 적어 주세요.</a:t>
@@ -4689,7 +4953,7 @@
             <a:r>
               <a:rPr sz="2000" b="0" i="0">
                 <a:solidFill>
-                  <a:srgbClr val="2B2B2B"/>
+                  <a:srgbClr val="26231F"/>
                 </a:solidFill>
               </a:rPr>
               <a:t/>
@@ -4704,7 +4968,7 @@
             <a:r>
               <a:rPr sz="2000" b="0" i="0">
                 <a:solidFill>
-                  <a:srgbClr val="2B2B2B"/>
+                  <a:srgbClr val="26231F"/>
                 </a:solidFill>
               </a:rPr>
               <a:t>― 엄마 아빠가</a:t>
@@ -4726,7 +4990,7 @@
     <p:bg>
       <p:bgPr>
         <a:solidFill>
-          <a:srgbClr val="FFFFFF"/>
+          <a:srgbClr val="EAFDF7"/>
         </a:solidFill>
         <a:effectLst/>
       </p:bgPr>
@@ -4746,14 +5010,14 @@
         </p:nvSpPr>
         <p:spPr>
           <a:xfrm>
-            <a:off x="9905695" y="-1463040"/>
-            <a:ext cx="3840480" cy="3840480"/>
-          </a:xfrm>
-          <a:prstGeom prst="ellipse">
+            <a:off x="640080" y="6400800"/>
+            <a:ext cx="10911535" cy="10972"/>
+          </a:xfrm>
+          <a:prstGeom prst="rect">
             <a:avLst/>
           </a:prstGeom>
           <a:solidFill>
-            <a:srgbClr val="D1FAEC"/>
+            <a:srgbClr val="26231F"/>
           </a:solidFill>
           <a:ln>
             <a:noFill/>
@@ -4769,20 +5033,58 @@
       </p:sp>
       <p:sp>
         <p:nvSpPr>
-          <p:cNvPr id="4" name="장식"/>
+          <p:cNvPr id="4" name="하단 라벨"/>
+          <p:cNvSpPr txBox="1"/>
+          <p:nvPr/>
+        </p:nvSpPr>
+        <p:spPr>
+          <a:xfrm>
+            <a:off x="640080" y="6437376"/>
+            <a:ext cx="5486400" cy="274320"/>
+          </a:xfrm>
+          <a:prstGeom prst="rect">
+            <a:avLst/>
+          </a:prstGeom>
+          <a:noFill/>
+        </p:spPr>
+        <p:txBody>
+          <a:bodyPr wrap="square" lIns="54864" rIns="54864" tIns="27432" bIns="27432" anchor="ctr">
+            <a:noAutofit/>
+          </a:bodyPr>
+          <a:lstStyle/>
+          <a:p>
+            <a:pPr algn="l">
+              <a:lnSpc>
+                <a:spcPct val="115000"/>
+              </a:lnSpc>
+            </a:pPr>
+            <a:r>
+              <a:rPr sz="900" b="1" i="0" spc="250">
+                <a:solidFill>
+                  <a:srgbClr val="26231F"/>
+                </a:solidFill>
+              </a:rPr>
+              <a:t>FIRST BIRTHDAY</a:t>
+            </a:r>
+          </a:p>
+        </p:txBody>
+      </p:sp>
+      <p:sp>
+        <p:nvSpPr>
+          <p:cNvPr id="5" name="포인트"/>
           <p:cNvSpPr/>
           <p:nvPr/>
         </p:nvSpPr>
         <p:spPr>
           <a:xfrm>
-            <a:off x="11094415" y="274320"/>
-            <a:ext cx="411480" cy="411480"/>
-          </a:xfrm>
-          <a:prstGeom prst="ellipse">
+            <a:off x="11213287" y="6473952"/>
+            <a:ext cx="219456" cy="219456"/>
+          </a:xfrm>
+          <a:prstGeom prst="sun">
             <a:avLst/>
           </a:prstGeom>
           <a:solidFill>
-            <a:srgbClr val="26C590"/>
+            <a:srgbClr val="7BEAC5"/>
           </a:solidFill>
           <a:ln>
             <a:noFill/>
@@ -4808,8 +5110,8 @@
         </p:nvSpPr>
         <p:spPr>
           <a:xfrm>
-            <a:off x="640080" y="457200"/>
-            <a:ext cx="9722815" cy="868680"/>
+            <a:off x="640080" y="502920"/>
+            <a:ext cx="10911535" cy="914400"/>
           </a:xfrm>
         </p:spPr>
         <p:txBody>
@@ -4826,7 +5128,7 @@
             <a:r>
               <a:rPr sz="3000" b="1" i="0">
                 <a:solidFill>
-                  <a:srgbClr val="115F45"/>
+                  <a:srgbClr val="26231F"/>
                 </a:solidFill>
               </a:rPr>
               <a:t>사진 모음</a:t>
@@ -4836,14 +5138,14 @@
       </p:sp>
       <p:sp>
         <p:nvSpPr>
-          <p:cNvPr id="5" name="사진 자리"/>
+          <p:cNvPr id="6" name="사진 자리"/>
           <p:cNvSpPr/>
           <p:nvPr/>
         </p:nvSpPr>
         <p:spPr>
           <a:xfrm>
             <a:off x="640080" y="1600200"/>
-            <a:ext cx="2590723" cy="2308860"/>
+            <a:ext cx="2590723" cy="2194560"/>
           </a:xfrm>
           <a:prstGeom prst="roundRect">
             <a:avLst>
@@ -4854,9 +5156,7 @@
             <a:srgbClr val="D1FAEC"/>
           </a:solidFill>
           <a:ln w="19050">
-            <a:solidFill>
-              <a:srgbClr val="26C590"/>
-            </a:solidFill>
+            <a:noFill/>
             <a:prstDash val="dash"/>
           </a:ln>
         </p:spPr>
@@ -4874,7 +5174,7 @@
             <a:r>
               <a:rPr sz="1200" b="0" i="0">
                 <a:solidFill>
-                  <a:srgbClr val="115F45"/>
+                  <a:srgbClr val="8E8780"/>
                 </a:solidFill>
               </a:rPr>
               <a:t>사진 1</a:t>
@@ -4884,14 +5184,14 @@
       </p:sp>
       <p:sp>
         <p:nvSpPr>
-          <p:cNvPr id="6" name="사진 자리"/>
+          <p:cNvPr id="7" name="사진 자리"/>
           <p:cNvSpPr/>
           <p:nvPr/>
         </p:nvSpPr>
         <p:spPr>
           <a:xfrm>
             <a:off x="3413683" y="1600200"/>
-            <a:ext cx="2590723" cy="2308860"/>
+            <a:ext cx="2590723" cy="2194560"/>
           </a:xfrm>
           <a:prstGeom prst="roundRect">
             <a:avLst>
@@ -4902,9 +5202,7 @@
             <a:srgbClr val="D1FAEC"/>
           </a:solidFill>
           <a:ln w="19050">
-            <a:solidFill>
-              <a:srgbClr val="26C590"/>
-            </a:solidFill>
+            <a:noFill/>
             <a:prstDash val="dash"/>
           </a:ln>
         </p:spPr>
@@ -4922,7 +5220,7 @@
             <a:r>
               <a:rPr sz="1200" b="0" i="0">
                 <a:solidFill>
-                  <a:srgbClr val="115F45"/>
+                  <a:srgbClr val="8E8780"/>
                 </a:solidFill>
               </a:rPr>
               <a:t>사진 2</a:t>
@@ -4932,14 +5230,14 @@
       </p:sp>
       <p:sp>
         <p:nvSpPr>
-          <p:cNvPr id="7" name="사진 자리"/>
+          <p:cNvPr id="8" name="사진 자리"/>
           <p:cNvSpPr/>
           <p:nvPr/>
         </p:nvSpPr>
         <p:spPr>
           <a:xfrm>
             <a:off x="6187287" y="1600200"/>
-            <a:ext cx="2590723" cy="2308860"/>
+            <a:ext cx="2590723" cy="2194560"/>
           </a:xfrm>
           <a:prstGeom prst="roundRect">
             <a:avLst>
@@ -4950,9 +5248,7 @@
             <a:srgbClr val="D1FAEC"/>
           </a:solidFill>
           <a:ln w="19050">
-            <a:solidFill>
-              <a:srgbClr val="26C590"/>
-            </a:solidFill>
+            <a:noFill/>
             <a:prstDash val="dash"/>
           </a:ln>
         </p:spPr>
@@ -4970,7 +5266,7 @@
             <a:r>
               <a:rPr sz="1200" b="0" i="0">
                 <a:solidFill>
-                  <a:srgbClr val="115F45"/>
+                  <a:srgbClr val="8E8780"/>
                 </a:solidFill>
               </a:rPr>
               <a:t>사진 3</a:t>
@@ -4980,14 +5276,14 @@
       </p:sp>
       <p:sp>
         <p:nvSpPr>
-          <p:cNvPr id="8" name="사진 자리"/>
+          <p:cNvPr id="9" name="사진 자리"/>
           <p:cNvSpPr/>
           <p:nvPr/>
         </p:nvSpPr>
         <p:spPr>
           <a:xfrm>
             <a:off x="8960891" y="1600200"/>
-            <a:ext cx="2590723" cy="2308860"/>
+            <a:ext cx="2590723" cy="2194560"/>
           </a:xfrm>
           <a:prstGeom prst="roundRect">
             <a:avLst>
@@ -4998,9 +5294,7 @@
             <a:srgbClr val="D1FAEC"/>
           </a:solidFill>
           <a:ln w="19050">
-            <a:solidFill>
-              <a:srgbClr val="26C590"/>
-            </a:solidFill>
+            <a:noFill/>
             <a:prstDash val="dash"/>
           </a:ln>
         </p:spPr>
@@ -5018,7 +5312,7 @@
             <a:r>
               <a:rPr sz="1200" b="0" i="0">
                 <a:solidFill>
-                  <a:srgbClr val="115F45"/>
+                  <a:srgbClr val="8E8780"/>
                 </a:solidFill>
               </a:rPr>
               <a:t>사진 4</a:t>
@@ -5028,14 +5322,14 @@
       </p:sp>
       <p:sp>
         <p:nvSpPr>
-          <p:cNvPr id="9" name="사진 자리"/>
+          <p:cNvPr id="10" name="사진 자리"/>
           <p:cNvSpPr/>
           <p:nvPr/>
         </p:nvSpPr>
         <p:spPr>
           <a:xfrm>
-            <a:off x="640080" y="4091939"/>
-            <a:ext cx="2590723" cy="2308860"/>
+            <a:off x="640080" y="3977639"/>
+            <a:ext cx="2590723" cy="2194560"/>
           </a:xfrm>
           <a:prstGeom prst="roundRect">
             <a:avLst>
@@ -5046,9 +5340,7 @@
             <a:srgbClr val="D1FAEC"/>
           </a:solidFill>
           <a:ln w="19050">
-            <a:solidFill>
-              <a:srgbClr val="26C590"/>
-            </a:solidFill>
+            <a:noFill/>
             <a:prstDash val="dash"/>
           </a:ln>
         </p:spPr>
@@ -5066,7 +5358,7 @@
             <a:r>
               <a:rPr sz="1200" b="0" i="0">
                 <a:solidFill>
-                  <a:srgbClr val="115F45"/>
+                  <a:srgbClr val="8E8780"/>
                 </a:solidFill>
               </a:rPr>
               <a:t>사진 5</a:t>
@@ -5076,14 +5368,14 @@
       </p:sp>
       <p:sp>
         <p:nvSpPr>
-          <p:cNvPr id="10" name="사진 자리"/>
+          <p:cNvPr id="11" name="사진 자리"/>
           <p:cNvSpPr/>
           <p:nvPr/>
         </p:nvSpPr>
         <p:spPr>
           <a:xfrm>
-            <a:off x="3413683" y="4091939"/>
-            <a:ext cx="2590723" cy="2308860"/>
+            <a:off x="3413683" y="3977639"/>
+            <a:ext cx="2590723" cy="2194560"/>
           </a:xfrm>
           <a:prstGeom prst="roundRect">
             <a:avLst>
@@ -5094,9 +5386,7 @@
             <a:srgbClr val="D1FAEC"/>
           </a:solidFill>
           <a:ln w="19050">
-            <a:solidFill>
-              <a:srgbClr val="26C590"/>
-            </a:solidFill>
+            <a:noFill/>
             <a:prstDash val="dash"/>
           </a:ln>
         </p:spPr>
@@ -5114,7 +5404,7 @@
             <a:r>
               <a:rPr sz="1200" b="0" i="0">
                 <a:solidFill>
-                  <a:srgbClr val="115F45"/>
+                  <a:srgbClr val="8E8780"/>
                 </a:solidFill>
               </a:rPr>
               <a:t>사진 6</a:t>
@@ -5124,14 +5414,14 @@
       </p:sp>
       <p:sp>
         <p:nvSpPr>
-          <p:cNvPr id="11" name="사진 자리"/>
+          <p:cNvPr id="12" name="사진 자리"/>
           <p:cNvSpPr/>
           <p:nvPr/>
         </p:nvSpPr>
         <p:spPr>
           <a:xfrm>
-            <a:off x="6187287" y="4091939"/>
-            <a:ext cx="2590723" cy="2308860"/>
+            <a:off x="6187287" y="3977639"/>
+            <a:ext cx="2590723" cy="2194560"/>
           </a:xfrm>
           <a:prstGeom prst="roundRect">
             <a:avLst>
@@ -5142,9 +5432,7 @@
             <a:srgbClr val="D1FAEC"/>
           </a:solidFill>
           <a:ln w="19050">
-            <a:solidFill>
-              <a:srgbClr val="26C590"/>
-            </a:solidFill>
+            <a:noFill/>
             <a:prstDash val="dash"/>
           </a:ln>
         </p:spPr>
@@ -5162,7 +5450,7 @@
             <a:r>
               <a:rPr sz="1200" b="0" i="0">
                 <a:solidFill>
-                  <a:srgbClr val="115F45"/>
+                  <a:srgbClr val="8E8780"/>
                 </a:solidFill>
               </a:rPr>
               <a:t>사진 7</a:t>
@@ -5172,14 +5460,14 @@
       </p:sp>
       <p:sp>
         <p:nvSpPr>
-          <p:cNvPr id="12" name="사진 자리"/>
+          <p:cNvPr id="13" name="사진 자리"/>
           <p:cNvSpPr/>
           <p:nvPr/>
         </p:nvSpPr>
         <p:spPr>
           <a:xfrm>
-            <a:off x="8960891" y="4091939"/>
-            <a:ext cx="2590723" cy="2308860"/>
+            <a:off x="8960891" y="3977639"/>
+            <a:ext cx="2590723" cy="2194560"/>
           </a:xfrm>
           <a:prstGeom prst="roundRect">
             <a:avLst>
@@ -5190,9 +5478,7 @@
             <a:srgbClr val="D1FAEC"/>
           </a:solidFill>
           <a:ln w="19050">
-            <a:solidFill>
-              <a:srgbClr val="26C590"/>
-            </a:solidFill>
+            <a:noFill/>
             <a:prstDash val="dash"/>
           </a:ln>
         </p:spPr>
@@ -5210,7 +5496,7 @@
             <a:r>
               <a:rPr sz="1200" b="0" i="0">
                 <a:solidFill>
-                  <a:srgbClr val="115F45"/>
+                  <a:srgbClr val="8E8780"/>
                 </a:solidFill>
               </a:rPr>
               <a:t>사진 8</a:t>
@@ -5229,6 +5515,14 @@
 <file path=ppt/slides/slide6.xml><?xml version="1.0" encoding="utf-8"?>
 <p:sld xmlns:a="http://schemas.openxmlformats.org/drawingml/2006/main" xmlns:p="http://schemas.openxmlformats.org/presentationml/2006/main" xmlns:r="http://schemas.openxmlformats.org/officeDocument/2006/relationships">
   <p:cSld>
+    <p:bg>
+      <p:bgPr>
+        <a:solidFill>
+          <a:srgbClr val="EAFDF7"/>
+        </a:solidFill>
+        <a:effectLst/>
+      </p:bgPr>
+    </p:bg>
     <p:spTree>
       <p:nvGrpSpPr>
         <p:cNvPr id="1" name=""/>
@@ -5236,30 +5530,116 @@
         <p:nvPr/>
       </p:nvGrpSpPr>
       <p:grpSpPr/>
-      <p:pic>
-        <p:nvPicPr>
-          <p:cNvPr id="3" name="표지 그림" descr="birthday-19.jpg"/>
-          <p:cNvPicPr>
-            <a:picLocks noChangeAspect="1"/>
-          </p:cNvPicPr>
+      <p:sp>
+        <p:nvSpPr>
+          <p:cNvPr id="3" name="사진 자리"/>
+          <p:cNvSpPr/>
           <p:nvPr/>
-        </p:nvPicPr>
-        <p:blipFill>
-          <a:blip r:embed="rId2"/>
-          <a:stretch>
-            <a:fillRect/>
-          </a:stretch>
-        </p:blipFill>
-        <p:spPr>
-          <a:xfrm>
-            <a:off x="0" y="0"/>
-            <a:ext cx="12191695" cy="6858000"/>
+        </p:nvSpPr>
+        <p:spPr>
+          <a:xfrm>
+            <a:off x="7802684" y="0"/>
+            <a:ext cx="4389010" cy="6858000"/>
           </a:xfrm>
           <a:prstGeom prst="rect">
             <a:avLst/>
           </a:prstGeom>
-        </p:spPr>
-      </p:pic>
+          <a:solidFill>
+            <a:srgbClr val="A5F3D9"/>
+          </a:solidFill>
+          <a:ln>
+            <a:noFill/>
+          </a:ln>
+        </p:spPr>
+        <p:txBody>
+          <a:bodyPr rtlCol="0" anchor="ctr" wrap="square" lIns="54864" rIns="54864" tIns="27432" bIns="27432">
+            <a:noAutofit/>
+          </a:bodyPr>
+          <a:lstStyle/>
+          <a:p>
+            <a:pPr algn="ctr">
+              <a:lnSpc>
+                <a:spcPct val="100000"/>
+              </a:lnSpc>
+            </a:pPr>
+            <a:r>
+              <a:rPr sz="1400" b="0" i="0">
+                <a:solidFill>
+                  <a:srgbClr val="27493E"/>
+                </a:solidFill>
+              </a:rPr>
+              <a:t>사진을 넣어 주세요</a:t>
+            </a:r>
+          </a:p>
+        </p:txBody>
+      </p:sp>
+      <p:sp>
+        <p:nvSpPr>
+          <p:cNvPr id="4" name="장식"/>
+          <p:cNvSpPr/>
+          <p:nvPr/>
+        </p:nvSpPr>
+        <p:spPr>
+          <a:xfrm>
+            <a:off x="8168435" y="365760"/>
+            <a:ext cx="3657508" cy="6126480"/>
+          </a:xfrm>
+          <a:prstGeom prst="rect">
+            <a:avLst/>
+          </a:prstGeom>
+          <a:noFill/>
+          <a:ln w="9525">
+            <a:solidFill>
+              <a:srgbClr val="26231F"/>
+            </a:solidFill>
+          </a:ln>
+        </p:spPr>
+        <p:txBody>
+          <a:bodyPr rtlCol="0" anchor="ctr"/>
+          <a:lstStyle/>
+          <a:p>
+            <a:pPr algn="ctr"/>
+          </a:p>
+        </p:txBody>
+      </p:sp>
+      <p:sp>
+        <p:nvSpPr>
+          <p:cNvPr id="5" name="라벨"/>
+          <p:cNvSpPr txBox="1"/>
+          <p:nvPr/>
+        </p:nvSpPr>
+        <p:spPr>
+          <a:xfrm>
+            <a:off x="822960" y="2148840"/>
+            <a:ext cx="5608179" cy="274320"/>
+          </a:xfrm>
+          <a:prstGeom prst="rect">
+            <a:avLst/>
+          </a:prstGeom>
+          <a:noFill/>
+        </p:spPr>
+        <p:txBody>
+          <a:bodyPr wrap="square" lIns="54864" rIns="54864" tIns="27432" bIns="27432" anchor="t">
+            <a:noAutofit/>
+          </a:bodyPr>
+          <a:lstStyle/>
+          <a:p>
+            <a:pPr algn="l">
+              <a:lnSpc>
+                <a:spcPct val="115000"/>
+              </a:lnSpc>
+            </a:pPr>
+            <a:r>
+              <a:rPr sz="1000" b="1" i="0" spc="250">
+                <a:solidFill>
+                  <a:srgbClr val="26231F"/>
+                </a:solidFill>
+              </a:rPr>
+              <a:t>FIRST BIRTHDAY</a:t>
+            </a:r>
+          </a:p>
+        </p:txBody>
+      </p:sp>
       <p:sp>
         <p:nvSpPr>
           <p:cNvPr id="2" name="Title 1"/>
@@ -5272,8 +5652,8 @@
         </p:nvSpPr>
         <p:spPr>
           <a:xfrm>
-            <a:off x="853418" y="2057400"/>
-            <a:ext cx="6095847" cy="1554480"/>
+            <a:off x="822960" y="2606040"/>
+            <a:ext cx="5608179" cy="1188720"/>
           </a:xfrm>
         </p:spPr>
         <p:txBody>
@@ -5290,7 +5670,7 @@
             <a:r>
               <a:rPr sz="3400" b="1" i="0">
                 <a:solidFill>
-                  <a:srgbClr val="115F45"/>
+                  <a:srgbClr val="26231F"/>
                 </a:solidFill>
               </a:rPr>
               <a:t>와 주셔서 고맙습니다</a:t>
@@ -5300,14 +5680,14 @@
       </p:sp>
       <p:sp>
         <p:nvSpPr>
-          <p:cNvPr id="4" name="한 줄 문구"/>
+          <p:cNvPr id="6" name="한 줄 문구"/>
           <p:cNvSpPr txBox="1"/>
           <p:nvPr/>
         </p:nvSpPr>
         <p:spPr>
           <a:xfrm>
-            <a:off x="853418" y="3749039"/>
-            <a:ext cx="6095847" cy="822960"/>
+            <a:off x="822960" y="3886200"/>
+            <a:ext cx="5608179" cy="822960"/>
           </a:xfrm>
           <a:prstGeom prst="rect">
             <a:avLst/>
@@ -5326,9 +5706,9 @@
               </a:lnSpc>
             </a:pPr>
             <a:r>
-              <a:rPr sz="1700" b="0" i="1">
+              <a:rPr sz="1700" b="0" i="0">
                 <a:solidFill>
-                  <a:srgbClr val="115F45"/>
+                  <a:srgbClr val="26231F"/>
                 </a:solidFill>
               </a:rPr>
               <a:t>아이가 한 살이 되었습니다</a:t>
@@ -5338,14 +5718,14 @@
       </p:sp>
       <p:sp>
         <p:nvSpPr>
-          <p:cNvPr id="5" name="안내 문구"/>
+          <p:cNvPr id="7" name="안내 문구"/>
           <p:cNvSpPr txBox="1"/>
           <p:nvPr/>
         </p:nvSpPr>
         <p:spPr>
           <a:xfrm>
-            <a:off x="853418" y="4617720"/>
-            <a:ext cx="6095847" cy="914400"/>
+            <a:off x="822960" y="4754880"/>
+            <a:ext cx="5608179" cy="914400"/>
           </a:xfrm>
           <a:prstGeom prst="rect">
             <a:avLst/>
@@ -5366,7 +5746,7 @@
             <a:r>
               <a:rPr sz="1400" b="0" i="0">
                 <a:solidFill>
-                  <a:srgbClr val="666666"/>
+                  <a:srgbClr val="26231F"/>
                 </a:solidFill>
               </a:rPr>
               <a:t>아기 이름 · 부모 이름</a:t>
@@ -5393,34 +5773,34 @@
         <a:sysClr val="window" lastClr="FFFFFF"/>
       </a:lt1>
       <a:dk2>
-        <a:srgbClr val="115F45"/>
+        <a:srgbClr val="27493E"/>
       </a:dk2>
       <a:lt2>
-        <a:srgbClr val="EEFCF7"/>
+        <a:srgbClr val="EAFDF7"/>
       </a:lt2>
       <a:accent1>
-        <a:srgbClr val="26C590"/>
+        <a:srgbClr val="7BEAC5"/>
       </a:accent1>
       <a:accent2>
-        <a:srgbClr val="209DB6"/>
+        <a:srgbClr val="9FE5EF"/>
       </a:accent2>
       <a:accent3>
-        <a:srgbClr val="115F45"/>
+        <a:srgbClr val="27493E"/>
       </a:accent3>
       <a:accent4>
         <a:srgbClr val="D1FAEC"/>
       </a:accent4>
       <a:accent5>
-        <a:srgbClr val="23B1A3"/>
+        <a:srgbClr val="8DE8DA"/>
       </a:accent5>
       <a:accent6>
-        <a:srgbClr val="709F8F"/>
+        <a:srgbClr val="7D928B"/>
       </a:accent6>
       <a:hlink>
-        <a:srgbClr val="26C590"/>
+        <a:srgbClr val="7BEAC5"/>
       </a:hlink>
       <a:folHlink>
-        <a:srgbClr val="115F45"/>
+        <a:srgbClr val="27493E"/>
       </a:folHlink>
     </a:clrScheme>
     <a:fontScheme name="Office">
